--- a/content/docs/theory-analysis/kubernetes-gateway-api-inference-extension/images/images.pptx
+++ b/content/docs/theory-analysis/kubernetes-gateway-api-inference-extension/images/images.pptx
@@ -4412,75 +4412,6 @@
       </p:sp>
       <p:sp>
         <p:nvSpPr>
-          <p:cNvPr id="20" name="사각형: 둥근 모서리 12">
-            <a:extLst>
-              <a:ext uri="{FF2B5EF4-FFF2-40B4-BE49-F238E27FC236}">
-                <a16:creationId xmlns:a16="http://schemas.microsoft.com/office/drawing/2014/main" id="{C8C9EFFA-0A7C-142E-99C9-0B9846DA2742}"/>
-              </a:ext>
-            </a:extLst>
-          </p:cNvPr>
-          <p:cNvSpPr/>
-          <p:nvPr/>
-        </p:nvSpPr>
-        <p:spPr>
-          <a:xfrm>
-            <a:off x="2090078" y="3070207"/>
-            <a:ext cx="1139438" cy="451511"/>
-          </a:xfrm>
-          <a:prstGeom prst="roundRect">
-            <a:avLst>
-              <a:gd name="adj" fmla="val 14105"/>
-            </a:avLst>
-          </a:prstGeom>
-          <a:noFill/>
-          <a:ln w="12700">
-            <a:headEnd type="none" w="med" len="med"/>
-            <a:tailEnd type="triangle" w="med" len="med"/>
-          </a:ln>
-        </p:spPr>
-        <p:style>
-          <a:lnRef idx="2">
-            <a:schemeClr val="dk1"/>
-          </a:lnRef>
-          <a:fillRef idx="1">
-            <a:schemeClr val="lt1"/>
-          </a:fillRef>
-          <a:effectRef idx="0">
-            <a:schemeClr val="dk1"/>
-          </a:effectRef>
-          <a:fontRef idx="minor">
-            <a:schemeClr val="dk1"/>
-          </a:fontRef>
-        </p:style>
-        <p:txBody>
-          <a:bodyPr rtlCol="0" anchor="ctr"/>
-          <a:lstStyle/>
-          <a:p>
-            <a:pPr algn="ctr"/>
-            <a:r>
-              <a:rPr lang="en-US" altLang="ko-KR" sz="900"/>
-              <a:t>Model A</a:t>
-            </a:r>
-          </a:p>
-          <a:p>
-            <a:pPr algn="ctr"/>
-            <a:r>
-              <a:rPr lang="en-US" altLang="ko-KR" sz="900" b="1" dirty="0"/>
-              <a:t>Service</a:t>
-            </a:r>
-          </a:p>
-          <a:p>
-            <a:pPr algn="ctr"/>
-            <a:r>
-              <a:rPr lang="en-US" altLang="ko-KR" sz="900" b="1" dirty="0"/>
-              <a:t>(Headless)</a:t>
-            </a:r>
-            <a:endParaRPr lang="ko-KR" altLang="en-US" sz="900" b="1" dirty="0"/>
-          </a:p>
-        </p:txBody>
-      </p:sp>
-      <p:sp>
-        <p:nvSpPr>
           <p:cNvPr id="21" name="사각형: 둥근 모서리 12">
             <a:extLst>
               <a:ext uri="{FF2B5EF4-FFF2-40B4-BE49-F238E27FC236}">
@@ -4895,110 +4826,14 @@
           <p:cNvCxnSpPr>
             <a:cxnSpLocks/>
             <a:stCxn id="14" idx="2"/>
-            <a:endCxn id="20" idx="0"/>
-          </p:cNvCxnSpPr>
-          <p:nvPr/>
-        </p:nvCxnSpPr>
-        <p:spPr>
-          <a:xfrm>
-            <a:off x="2659797" y="2477728"/>
-            <a:ext cx="0" cy="592479"/>
-          </a:xfrm>
-          <a:prstGeom prst="straightConnector1">
-            <a:avLst/>
-          </a:prstGeom>
-          <a:ln w="12700">
-            <a:solidFill>
-              <a:srgbClr val="C00000"/>
-            </a:solidFill>
-            <a:prstDash val="solid"/>
-            <a:headEnd type="none" w="med" len="med"/>
-            <a:tailEnd type="triangle" w="med" len="med"/>
-          </a:ln>
-        </p:spPr>
-        <p:style>
-          <a:lnRef idx="1">
-            <a:schemeClr val="accent1"/>
-          </a:lnRef>
-          <a:fillRef idx="0">
-            <a:schemeClr val="accent1"/>
-          </a:fillRef>
-          <a:effectRef idx="0">
-            <a:schemeClr val="accent1"/>
-          </a:effectRef>
-          <a:fontRef idx="minor">
-            <a:schemeClr val="tx1"/>
-          </a:fontRef>
-        </p:style>
-      </p:cxnSp>
-      <p:cxnSp>
-        <p:nvCxnSpPr>
-          <p:cNvPr id="59" name="직선 화살표 연결선 96">
-            <a:extLst>
-              <a:ext uri="{FF2B5EF4-FFF2-40B4-BE49-F238E27FC236}">
-                <a16:creationId xmlns:a16="http://schemas.microsoft.com/office/drawing/2014/main" id="{C03660A1-4EB1-AB11-9891-43717BF3D0FA}"/>
-              </a:ext>
-            </a:extLst>
-          </p:cNvPr>
-          <p:cNvCxnSpPr>
-            <a:cxnSpLocks/>
-            <a:stCxn id="91" idx="0"/>
-            <a:endCxn id="20" idx="3"/>
-          </p:cNvCxnSpPr>
-          <p:nvPr/>
-        </p:nvCxnSpPr>
-        <p:spPr>
-          <a:xfrm flipH="1" flipV="1">
-            <a:off x="3229516" y="3295963"/>
-            <a:ext cx="746846" cy="487388"/>
-          </a:xfrm>
-          <a:prstGeom prst="straightConnector1">
-            <a:avLst/>
-          </a:prstGeom>
-          <a:ln w="12700">
-            <a:solidFill>
-              <a:schemeClr val="tx1"/>
-            </a:solidFill>
-            <a:prstDash val="dash"/>
-            <a:headEnd type="none" w="med" len="med"/>
-            <a:tailEnd type="triangle" w="med" len="med"/>
-          </a:ln>
-        </p:spPr>
-        <p:style>
-          <a:lnRef idx="1">
-            <a:schemeClr val="accent1"/>
-          </a:lnRef>
-          <a:fillRef idx="0">
-            <a:schemeClr val="accent1"/>
-          </a:fillRef>
-          <a:effectRef idx="0">
-            <a:schemeClr val="accent1"/>
-          </a:effectRef>
-          <a:fontRef idx="minor">
-            <a:schemeClr val="tx1"/>
-          </a:fontRef>
-        </p:style>
-      </p:cxnSp>
-      <p:cxnSp>
-        <p:nvCxnSpPr>
-          <p:cNvPr id="64" name="직선 화살표 연결선 96">
-            <a:extLst>
-              <a:ext uri="{FF2B5EF4-FFF2-40B4-BE49-F238E27FC236}">
-                <a16:creationId xmlns:a16="http://schemas.microsoft.com/office/drawing/2014/main" id="{EE9352DA-8A8B-090B-10A3-13D559074C51}"/>
-              </a:ext>
-            </a:extLst>
-          </p:cNvPr>
-          <p:cNvCxnSpPr>
-            <a:cxnSpLocks/>
-            <a:stCxn id="20" idx="2"/>
             <a:endCxn id="21" idx="0"/>
           </p:cNvCxnSpPr>
           <p:nvPr/>
         </p:nvCxnSpPr>
         <p:spPr>
           <a:xfrm>
-            <a:off x="2659797" y="3521718"/>
-            <a:ext cx="0" cy="261634"/>
+            <a:off x="2659797" y="2477728"/>
+            <a:ext cx="0" cy="1305624"/>
           </a:xfrm>
           <a:prstGeom prst="straightConnector1">
             <a:avLst/>
@@ -5123,54 +4958,6 @@
           </a:fontRef>
         </p:style>
       </p:cxnSp>
-      <p:cxnSp>
-        <p:nvCxnSpPr>
-          <p:cNvPr id="76" name="직선 화살표 연결선 96">
-            <a:extLst>
-              <a:ext uri="{FF2B5EF4-FFF2-40B4-BE49-F238E27FC236}">
-                <a16:creationId xmlns:a16="http://schemas.microsoft.com/office/drawing/2014/main" id="{22EB8634-FA08-FDF6-BA47-D70F6D328EFE}"/>
-              </a:ext>
-            </a:extLst>
-          </p:cNvPr>
-          <p:cNvCxnSpPr>
-            <a:cxnSpLocks/>
-            <a:stCxn id="11" idx="2"/>
-            <a:endCxn id="20" idx="0"/>
-          </p:cNvCxnSpPr>
-          <p:nvPr/>
-        </p:nvCxnSpPr>
-        <p:spPr>
-          <a:xfrm flipH="1">
-            <a:off x="2659797" y="761231"/>
-            <a:ext cx="3940455" cy="2308976"/>
-          </a:xfrm>
-          <a:prstGeom prst="straightConnector1">
-            <a:avLst/>
-          </a:prstGeom>
-          <a:ln w="12700">
-            <a:solidFill>
-              <a:schemeClr val="accent3"/>
-            </a:solidFill>
-            <a:prstDash val="solid"/>
-            <a:headEnd type="none" w="med" len="med"/>
-            <a:tailEnd type="triangle" w="med" len="med"/>
-          </a:ln>
-        </p:spPr>
-        <p:style>
-          <a:lnRef idx="1">
-            <a:schemeClr val="accent1"/>
-          </a:lnRef>
-          <a:fillRef idx="0">
-            <a:schemeClr val="accent1"/>
-          </a:fillRef>
-          <a:effectRef idx="0">
-            <a:schemeClr val="accent1"/>
-          </a:effectRef>
-          <a:fontRef idx="minor">
-            <a:schemeClr val="tx1"/>
-          </a:fontRef>
-        </p:style>
-      </p:cxnSp>
       <p:sp>
         <p:nvSpPr>
           <p:cNvPr id="79" name="사각형: 둥근 모서리 12">
@@ -5687,10 +5474,10 @@
       </p:sp>
       <p:sp>
         <p:nvSpPr>
-          <p:cNvPr id="127" name="사각형: 둥근 모서리 12">
-            <a:extLst>
-              <a:ext uri="{FF2B5EF4-FFF2-40B4-BE49-F238E27FC236}">
-                <a16:creationId xmlns:a16="http://schemas.microsoft.com/office/drawing/2014/main" id="{A3F42500-BAA6-D0E6-EF69-3A6718DF3EE8}"/>
+          <p:cNvPr id="129" name="사각형: 둥근 모서리 12">
+            <a:extLst>
+              <a:ext uri="{FF2B5EF4-FFF2-40B4-BE49-F238E27FC236}">
+                <a16:creationId xmlns:a16="http://schemas.microsoft.com/office/drawing/2014/main" id="{5587DC12-C6E5-D889-35F0-0E8F4595393E}"/>
               </a:ext>
             </a:extLst>
           </p:cNvPr>
@@ -5699,7 +5486,7 @@
         </p:nvSpPr>
         <p:spPr>
           <a:xfrm>
-            <a:off x="6034548" y="3070206"/>
+            <a:off x="6034548" y="3783351"/>
             <a:ext cx="1139438" cy="451511"/>
           </a:xfrm>
           <a:prstGeom prst="roundRect">
@@ -5741,129 +5528,12 @@
             <a:pPr algn="ctr"/>
             <a:r>
               <a:rPr lang="en-US" altLang="ko-KR" sz="900" b="1" dirty="0"/>
-              <a:t>Service</a:t>
-            </a:r>
-          </a:p>
-          <a:p>
-            <a:pPr algn="ctr"/>
-            <a:r>
-              <a:rPr lang="en-US" altLang="ko-KR" sz="900" b="1" dirty="0"/>
-              <a:t>(Headless)</a:t>
+              <a:t>Deployment</a:t>
             </a:r>
             <a:endParaRPr lang="ko-KR" altLang="en-US" sz="900" b="1" dirty="0"/>
           </a:p>
         </p:txBody>
       </p:sp>
-      <p:sp>
-        <p:nvSpPr>
-          <p:cNvPr id="129" name="사각형: 둥근 모서리 12">
-            <a:extLst>
-              <a:ext uri="{FF2B5EF4-FFF2-40B4-BE49-F238E27FC236}">
-                <a16:creationId xmlns:a16="http://schemas.microsoft.com/office/drawing/2014/main" id="{5587DC12-C6E5-D889-35F0-0E8F4595393E}"/>
-              </a:ext>
-            </a:extLst>
-          </p:cNvPr>
-          <p:cNvSpPr/>
-          <p:nvPr/>
-        </p:nvSpPr>
-        <p:spPr>
-          <a:xfrm>
-            <a:off x="6034548" y="3783351"/>
-            <a:ext cx="1139438" cy="451511"/>
-          </a:xfrm>
-          <a:prstGeom prst="roundRect">
-            <a:avLst>
-              <a:gd name="adj" fmla="val 14105"/>
-            </a:avLst>
-          </a:prstGeom>
-          <a:noFill/>
-          <a:ln w="12700">
-            <a:headEnd type="none" w="med" len="med"/>
-            <a:tailEnd type="triangle" w="med" len="med"/>
-          </a:ln>
-        </p:spPr>
-        <p:style>
-          <a:lnRef idx="2">
-            <a:schemeClr val="dk1"/>
-          </a:lnRef>
-          <a:fillRef idx="1">
-            <a:schemeClr val="lt1"/>
-          </a:fillRef>
-          <a:effectRef idx="0">
-            <a:schemeClr val="dk1"/>
-          </a:effectRef>
-          <a:fontRef idx="minor">
-            <a:schemeClr val="dk1"/>
-          </a:fontRef>
-        </p:style>
-        <p:txBody>
-          <a:bodyPr rtlCol="0" anchor="ctr"/>
-          <a:lstStyle/>
-          <a:p>
-            <a:pPr algn="ctr"/>
-            <a:r>
-              <a:rPr lang="en-US" altLang="ko-KR" sz="900"/>
-              <a:t>Model B</a:t>
-            </a:r>
-          </a:p>
-          <a:p>
-            <a:pPr algn="ctr"/>
-            <a:r>
-              <a:rPr lang="en-US" altLang="ko-KR" sz="900" b="1" dirty="0"/>
-              <a:t>Deployment</a:t>
-            </a:r>
-            <a:endParaRPr lang="ko-KR" altLang="en-US" sz="900" b="1" dirty="0"/>
-          </a:p>
-        </p:txBody>
-      </p:sp>
-      <p:cxnSp>
-        <p:nvCxnSpPr>
-          <p:cNvPr id="130" name="직선 화살표 연결선 96">
-            <a:extLst>
-              <a:ext uri="{FF2B5EF4-FFF2-40B4-BE49-F238E27FC236}">
-                <a16:creationId xmlns:a16="http://schemas.microsoft.com/office/drawing/2014/main" id="{D2B730F1-BD05-E98F-3E2F-E43DCA468E50}"/>
-              </a:ext>
-            </a:extLst>
-          </p:cNvPr>
-          <p:cNvCxnSpPr>
-            <a:cxnSpLocks/>
-            <a:stCxn id="115" idx="0"/>
-            <a:endCxn id="127" idx="1"/>
-          </p:cNvCxnSpPr>
-          <p:nvPr/>
-        </p:nvCxnSpPr>
-        <p:spPr>
-          <a:xfrm flipV="1">
-            <a:off x="5287625" y="3295962"/>
-            <a:ext cx="746923" cy="487388"/>
-          </a:xfrm>
-          <a:prstGeom prst="straightConnector1">
-            <a:avLst/>
-          </a:prstGeom>
-          <a:ln w="12700">
-            <a:solidFill>
-              <a:schemeClr val="tx1"/>
-            </a:solidFill>
-            <a:prstDash val="dash"/>
-            <a:headEnd type="none" w="med" len="med"/>
-            <a:tailEnd type="triangle" w="med" len="med"/>
-          </a:ln>
-        </p:spPr>
-        <p:style>
-          <a:lnRef idx="1">
-            <a:schemeClr val="accent1"/>
-          </a:lnRef>
-          <a:fillRef idx="0">
-            <a:schemeClr val="accent1"/>
-          </a:fillRef>
-          <a:effectRef idx="0">
-            <a:schemeClr val="accent1"/>
-          </a:effectRef>
-          <a:fontRef idx="minor">
-            <a:schemeClr val="tx1"/>
-          </a:fontRef>
-        </p:style>
-      </p:cxnSp>
       <p:cxnSp>
         <p:nvCxnSpPr>
           <p:cNvPr id="135" name="직선 화살표 연결선 96">
@@ -5876,62 +5546,14 @@
           <p:cNvCxnSpPr>
             <a:cxnSpLocks/>
             <a:stCxn id="14" idx="2"/>
-            <a:endCxn id="127" idx="0"/>
-          </p:cNvCxnSpPr>
-          <p:nvPr/>
-        </p:nvCxnSpPr>
-        <p:spPr>
-          <a:xfrm>
-            <a:off x="2659797" y="2477728"/>
-            <a:ext cx="3944470" cy="592478"/>
-          </a:xfrm>
-          <a:prstGeom prst="straightConnector1">
-            <a:avLst/>
-          </a:prstGeom>
-          <a:ln w="12700">
-            <a:solidFill>
-              <a:srgbClr val="C00000"/>
-            </a:solidFill>
-            <a:prstDash val="solid"/>
-            <a:headEnd type="none" w="med" len="med"/>
-            <a:tailEnd type="triangle" w="med" len="med"/>
-          </a:ln>
-        </p:spPr>
-        <p:style>
-          <a:lnRef idx="1">
-            <a:schemeClr val="accent1"/>
-          </a:lnRef>
-          <a:fillRef idx="0">
-            <a:schemeClr val="accent1"/>
-          </a:fillRef>
-          <a:effectRef idx="0">
-            <a:schemeClr val="accent1"/>
-          </a:effectRef>
-          <a:fontRef idx="minor">
-            <a:schemeClr val="tx1"/>
-          </a:fontRef>
-        </p:style>
-      </p:cxnSp>
-      <p:cxnSp>
-        <p:nvCxnSpPr>
-          <p:cNvPr id="139" name="직선 화살표 연결선 96">
-            <a:extLst>
-              <a:ext uri="{FF2B5EF4-FFF2-40B4-BE49-F238E27FC236}">
-                <a16:creationId xmlns:a16="http://schemas.microsoft.com/office/drawing/2014/main" id="{A9CCFB15-267E-BF78-1CEF-F3C43A036D39}"/>
-              </a:ext>
-            </a:extLst>
-          </p:cNvPr>
-          <p:cNvCxnSpPr>
-            <a:cxnSpLocks/>
-            <a:stCxn id="127" idx="2"/>
             <a:endCxn id="129" idx="0"/>
           </p:cNvCxnSpPr>
           <p:nvPr/>
         </p:nvCxnSpPr>
         <p:spPr>
           <a:xfrm>
-            <a:off x="6604267" y="3521717"/>
-            <a:ext cx="0" cy="261634"/>
+            <a:off x="2659797" y="2477728"/>
+            <a:ext cx="3944470" cy="1305623"/>
           </a:xfrm>
           <a:prstGeom prst="straightConnector1">
             <a:avLst/>
@@ -6104,54 +5726,6 @@
           </a:fontRef>
         </p:style>
       </p:cxnSp>
-      <p:cxnSp>
-        <p:nvCxnSpPr>
-          <p:cNvPr id="175" name="직선 화살표 연결선 96">
-            <a:extLst>
-              <a:ext uri="{FF2B5EF4-FFF2-40B4-BE49-F238E27FC236}">
-                <a16:creationId xmlns:a16="http://schemas.microsoft.com/office/drawing/2014/main" id="{8379E19C-7FD4-945C-2D25-70DB27D951A8}"/>
-              </a:ext>
-            </a:extLst>
-          </p:cNvPr>
-          <p:cNvCxnSpPr>
-            <a:cxnSpLocks/>
-            <a:stCxn id="11" idx="2"/>
-            <a:endCxn id="127" idx="0"/>
-          </p:cNvCxnSpPr>
-          <p:nvPr/>
-        </p:nvCxnSpPr>
-        <p:spPr>
-          <a:xfrm>
-            <a:off x="6600252" y="761231"/>
-            <a:ext cx="4015" cy="2308975"/>
-          </a:xfrm>
-          <a:prstGeom prst="straightConnector1">
-            <a:avLst/>
-          </a:prstGeom>
-          <a:ln w="12700">
-            <a:solidFill>
-              <a:schemeClr val="accent3"/>
-            </a:solidFill>
-            <a:prstDash val="solid"/>
-            <a:headEnd type="none" w="med" len="med"/>
-            <a:tailEnd type="triangle" w="med" len="med"/>
-          </a:ln>
-        </p:spPr>
-        <p:style>
-          <a:lnRef idx="1">
-            <a:schemeClr val="accent1"/>
-          </a:lnRef>
-          <a:fillRef idx="0">
-            <a:schemeClr val="accent1"/>
-          </a:fillRef>
-          <a:effectRef idx="0">
-            <a:schemeClr val="accent1"/>
-          </a:effectRef>
-          <a:fontRef idx="minor">
-            <a:schemeClr val="tx1"/>
-          </a:fontRef>
-        </p:style>
-      </p:cxnSp>
       <p:sp>
         <p:nvSpPr>
           <p:cNvPr id="179" name="사각형: 둥근 모서리 12">
@@ -6201,7 +5775,7 @@
             <a:pPr algn="ctr"/>
             <a:r>
               <a:rPr lang="en-US" altLang="ko-KR" sz="900"/>
-              <a:t>Model A EPP</a:t>
+              <a:t>Model B EPP</a:t>
             </a:r>
           </a:p>
           <a:p>
@@ -6263,7 +5837,7 @@
             <a:pPr algn="ctr"/>
             <a:r>
               <a:rPr lang="en-US" altLang="ko-KR" sz="900"/>
-              <a:t>Model A EPP</a:t>
+              <a:t>Model B EPP</a:t>
             </a:r>
           </a:p>
           <a:p>
@@ -6830,6 +6404,102 @@
           </a:p>
         </p:txBody>
       </p:sp>
+      <p:cxnSp>
+        <p:nvCxnSpPr>
+          <p:cNvPr id="6" name="직선 화살표 연결선 96">
+            <a:extLst>
+              <a:ext uri="{FF2B5EF4-FFF2-40B4-BE49-F238E27FC236}">
+                <a16:creationId xmlns:a16="http://schemas.microsoft.com/office/drawing/2014/main" id="{92AD9100-63C3-B3D0-8690-FEF30E053294}"/>
+              </a:ext>
+            </a:extLst>
+          </p:cNvPr>
+          <p:cNvCxnSpPr>
+            <a:cxnSpLocks/>
+            <a:stCxn id="91" idx="1"/>
+            <a:endCxn id="86" idx="3"/>
+          </p:cNvCxnSpPr>
+          <p:nvPr/>
+        </p:nvCxnSpPr>
+        <p:spPr>
+          <a:xfrm flipH="1" flipV="1">
+            <a:off x="1912951" y="3295962"/>
+            <a:ext cx="1493692" cy="713145"/>
+          </a:xfrm>
+          <a:prstGeom prst="straightConnector1">
+            <a:avLst/>
+          </a:prstGeom>
+          <a:ln w="12700">
+            <a:solidFill>
+              <a:schemeClr val="tx1"/>
+            </a:solidFill>
+            <a:prstDash val="solid"/>
+            <a:headEnd type="none" w="med" len="med"/>
+            <a:tailEnd type="triangle" w="med" len="med"/>
+          </a:ln>
+        </p:spPr>
+        <p:style>
+          <a:lnRef idx="1">
+            <a:schemeClr val="accent1"/>
+          </a:lnRef>
+          <a:fillRef idx="0">
+            <a:schemeClr val="accent1"/>
+          </a:fillRef>
+          <a:effectRef idx="0">
+            <a:schemeClr val="accent1"/>
+          </a:effectRef>
+          <a:fontRef idx="minor">
+            <a:schemeClr val="tx1"/>
+          </a:fontRef>
+        </p:style>
+      </p:cxnSp>
+      <p:cxnSp>
+        <p:nvCxnSpPr>
+          <p:cNvPr id="13" name="직선 화살표 연결선 96">
+            <a:extLst>
+              <a:ext uri="{FF2B5EF4-FFF2-40B4-BE49-F238E27FC236}">
+                <a16:creationId xmlns:a16="http://schemas.microsoft.com/office/drawing/2014/main" id="{95641BB8-56F9-EC9E-E8A1-17683F98C72E}"/>
+              </a:ext>
+            </a:extLst>
+          </p:cNvPr>
+          <p:cNvCxnSpPr>
+            <a:cxnSpLocks/>
+            <a:stCxn id="115" idx="3"/>
+            <a:endCxn id="181" idx="1"/>
+          </p:cNvCxnSpPr>
+          <p:nvPr/>
+        </p:nvCxnSpPr>
+        <p:spPr>
+          <a:xfrm flipV="1">
+            <a:off x="5857344" y="3295962"/>
+            <a:ext cx="1493846" cy="713144"/>
+          </a:xfrm>
+          <a:prstGeom prst="straightConnector1">
+            <a:avLst/>
+          </a:prstGeom>
+          <a:ln w="12700">
+            <a:solidFill>
+              <a:schemeClr val="tx1"/>
+            </a:solidFill>
+            <a:prstDash val="solid"/>
+            <a:headEnd type="none" w="med" len="med"/>
+            <a:tailEnd type="triangle" w="med" len="med"/>
+          </a:ln>
+        </p:spPr>
+        <p:style>
+          <a:lnRef idx="1">
+            <a:schemeClr val="accent1"/>
+          </a:lnRef>
+          <a:fillRef idx="0">
+            <a:schemeClr val="accent1"/>
+          </a:fillRef>
+          <a:effectRef idx="0">
+            <a:schemeClr val="accent1"/>
+          </a:effectRef>
+          <a:fontRef idx="minor">
+            <a:schemeClr val="tx1"/>
+          </a:fontRef>
+        </p:style>
+      </p:cxnSp>
     </p:spTree>
     <p:extLst>
       <p:ext uri="{BB962C8B-B14F-4D97-AF65-F5344CB8AC3E}">

--- a/content/docs/theory-analysis/kubernetes-gateway-api-inference-extension/images/images.pptx
+++ b/content/docs/theory-analysis/kubernetes-gateway-api-inference-extension/images/images.pptx
@@ -5,16 +5,17 @@
     <p:sldMasterId id="2147483648" r:id="rId1"/>
   </p:sldMasterIdLst>
   <p:notesMasterIdLst>
-    <p:notesMasterId r:id="rId9"/>
+    <p:notesMasterId r:id="rId10"/>
   </p:notesMasterIdLst>
   <p:sldIdLst>
-    <p:sldId id="435" r:id="rId2"/>
-    <p:sldId id="437" r:id="rId3"/>
-    <p:sldId id="442" r:id="rId4"/>
-    <p:sldId id="441" r:id="rId5"/>
-    <p:sldId id="440" r:id="rId6"/>
-    <p:sldId id="439" r:id="rId7"/>
-    <p:sldId id="438" r:id="rId8"/>
+    <p:sldId id="443" r:id="rId2"/>
+    <p:sldId id="435" r:id="rId3"/>
+    <p:sldId id="437" r:id="rId4"/>
+    <p:sldId id="442" r:id="rId5"/>
+    <p:sldId id="441" r:id="rId6"/>
+    <p:sldId id="440" r:id="rId7"/>
+    <p:sldId id="439" r:id="rId8"/>
+    <p:sldId id="438" r:id="rId9"/>
   </p:sldIdLst>
   <p:sldSz cx="9144000" cy="5143500" type="screen16x9"/>
   <p:notesSz cx="6858000" cy="9144000"/>
@@ -219,7 +220,7 @@
           <a:p>
             <a:fld id="{6CD5550B-26C4-49A9-A5BA-636EF7BE6CE9}" type="datetimeFigureOut">
               <a:rPr lang="ko-KR" altLang="en-US" smtClean="0"/>
-              <a:t>2026. 10. 4.</a:t>
+              <a:t>2026. 10. 6.</a:t>
             </a:fld>
             <a:endParaRPr lang="ko-KR" altLang="en-US"/>
           </a:p>
@@ -491,6 +492,114 @@
   <p:cSld>
     <p:spTree>
       <p:nvGrpSpPr>
+        <p:cNvPr id="1" name="">
+          <a:extLst>
+            <a:ext uri="{FF2B5EF4-FFF2-40B4-BE49-F238E27FC236}">
+              <a16:creationId xmlns:a16="http://schemas.microsoft.com/office/drawing/2014/main" id="{2E76AA3C-9DA0-F66F-B1E0-67A041EEDF64}"/>
+            </a:ext>
+          </a:extLst>
+        </p:cNvPr>
+        <p:cNvGrpSpPr/>
+        <p:nvPr/>
+      </p:nvGrpSpPr>
+      <p:grpSpPr>
+        <a:xfrm>
+          <a:off x="0" y="0"/>
+          <a:ext cx="0" cy="0"/>
+          <a:chOff x="0" y="0"/>
+          <a:chExt cx="0" cy="0"/>
+        </a:xfrm>
+      </p:grpSpPr>
+      <p:sp>
+        <p:nvSpPr>
+          <p:cNvPr id="2" name="슬라이드 이미지 개체 틀 1">
+            <a:extLst>
+              <a:ext uri="{FF2B5EF4-FFF2-40B4-BE49-F238E27FC236}">
+                <a16:creationId xmlns:a16="http://schemas.microsoft.com/office/drawing/2014/main" id="{12AAACC5-32B9-041A-F7AC-02F4F331E65A}"/>
+              </a:ext>
+            </a:extLst>
+          </p:cNvPr>
+          <p:cNvSpPr>
+            <a:spLocks noGrp="1" noRot="1" noChangeAspect="1"/>
+          </p:cNvSpPr>
+          <p:nvPr>
+            <p:ph type="sldImg"/>
+          </p:nvPr>
+        </p:nvSpPr>
+        <p:spPr/>
+      </p:sp>
+      <p:sp>
+        <p:nvSpPr>
+          <p:cNvPr id="3" name="슬라이드 노트 개체 틀 2">
+            <a:extLst>
+              <a:ext uri="{FF2B5EF4-FFF2-40B4-BE49-F238E27FC236}">
+                <a16:creationId xmlns:a16="http://schemas.microsoft.com/office/drawing/2014/main" id="{37FA6CE9-C801-BAD5-6830-9EED1050D239}"/>
+              </a:ext>
+            </a:extLst>
+          </p:cNvPr>
+          <p:cNvSpPr>
+            <a:spLocks noGrp="1"/>
+          </p:cNvSpPr>
+          <p:nvPr>
+            <p:ph type="body" idx="1"/>
+          </p:nvPr>
+        </p:nvSpPr>
+        <p:spPr/>
+        <p:txBody>
+          <a:bodyPr/>
+          <a:lstStyle/>
+          <a:p>
+            <a:endParaRPr kumimoji="1" lang="ko-KR" altLang="en-US"/>
+          </a:p>
+        </p:txBody>
+      </p:sp>
+      <p:sp>
+        <p:nvSpPr>
+          <p:cNvPr id="4" name="슬라이드 번호 개체 틀 3">
+            <a:extLst>
+              <a:ext uri="{FF2B5EF4-FFF2-40B4-BE49-F238E27FC236}">
+                <a16:creationId xmlns:a16="http://schemas.microsoft.com/office/drawing/2014/main" id="{D6672E76-F94B-E857-755B-84228FC56E24}"/>
+              </a:ext>
+            </a:extLst>
+          </p:cNvPr>
+          <p:cNvSpPr>
+            <a:spLocks noGrp="1"/>
+          </p:cNvSpPr>
+          <p:nvPr>
+            <p:ph type="sldNum" sz="quarter" idx="5"/>
+          </p:nvPr>
+        </p:nvSpPr>
+        <p:spPr/>
+        <p:txBody>
+          <a:bodyPr/>
+          <a:lstStyle/>
+          <a:p>
+            <a:fld id="{BA5DFA43-8D57-47FB-BC46-057616015C3B}" type="slidenum">
+              <a:rPr lang="ko-KR" altLang="en-US" smtClean="0"/>
+              <a:t>1</a:t>
+            </a:fld>
+            <a:endParaRPr lang="ko-KR" altLang="en-US"/>
+          </a:p>
+        </p:txBody>
+      </p:sp>
+    </p:spTree>
+    <p:extLst>
+      <p:ext uri="{BB962C8B-B14F-4D97-AF65-F5344CB8AC3E}">
+        <p14:creationId xmlns:p14="http://schemas.microsoft.com/office/powerpoint/2010/main" val="1948931584"/>
+      </p:ext>
+    </p:extLst>
+  </p:cSld>
+  <p:clrMapOvr>
+    <a:masterClrMapping/>
+  </p:clrMapOvr>
+</p:notes>
+</file>
+
+<file path=ppt/notesSlides/notesSlide2.xml><?xml version="1.0" encoding="utf-8"?>
+<p:notes xmlns:a="http://schemas.openxmlformats.org/drawingml/2006/main" xmlns:r="http://schemas.openxmlformats.org/officeDocument/2006/relationships" xmlns:p="http://schemas.openxmlformats.org/presentationml/2006/main">
+  <p:cSld>
+    <p:spTree>
+      <p:nvGrpSpPr>
         <p:cNvPr id="1" name=""/>
         <p:cNvGrpSpPr/>
         <p:nvPr/>
@@ -551,7 +660,7 @@
           <a:p>
             <a:fld id="{BA5DFA43-8D57-47FB-BC46-057616015C3B}" type="slidenum">
               <a:rPr lang="ko-KR" altLang="en-US" smtClean="0"/>
-              <a:t>1</a:t>
+              <a:t>2</a:t>
             </a:fld>
             <a:endParaRPr lang="ko-KR" altLang="en-US"/>
           </a:p>
@@ -570,7 +679,7 @@
 </p:notes>
 </file>
 
-<file path=ppt/notesSlides/notesSlide2.xml><?xml version="1.0" encoding="utf-8"?>
+<file path=ppt/notesSlides/notesSlide3.xml><?xml version="1.0" encoding="utf-8"?>
 <p:notes xmlns:a="http://schemas.openxmlformats.org/drawingml/2006/main" xmlns:r="http://schemas.openxmlformats.org/officeDocument/2006/relationships" xmlns:p="http://schemas.openxmlformats.org/presentationml/2006/main">
   <p:cSld>
     <p:spTree>
@@ -659,7 +768,7 @@
           <a:p>
             <a:fld id="{BA5DFA43-8D57-47FB-BC46-057616015C3B}" type="slidenum">
               <a:rPr lang="ko-KR" altLang="en-US" smtClean="0"/>
-              <a:t>3</a:t>
+              <a:t>4</a:t>
             </a:fld>
             <a:endParaRPr lang="ko-KR" altLang="en-US"/>
           </a:p>
@@ -678,7 +787,7 @@
 </p:notes>
 </file>
 
-<file path=ppt/notesSlides/notesSlide3.xml><?xml version="1.0" encoding="utf-8"?>
+<file path=ppt/notesSlides/notesSlide4.xml><?xml version="1.0" encoding="utf-8"?>
 <p:notes xmlns:a="http://schemas.openxmlformats.org/drawingml/2006/main" xmlns:r="http://schemas.openxmlformats.org/officeDocument/2006/relationships" xmlns:p="http://schemas.openxmlformats.org/presentationml/2006/main">
   <p:cSld>
     <p:spTree>
@@ -767,7 +876,7 @@
           <a:p>
             <a:fld id="{BA5DFA43-8D57-47FB-BC46-057616015C3B}" type="slidenum">
               <a:rPr lang="ko-KR" altLang="en-US" smtClean="0"/>
-              <a:t>4</a:t>
+              <a:t>5</a:t>
             </a:fld>
             <a:endParaRPr lang="ko-KR" altLang="en-US"/>
           </a:p>
@@ -786,7 +895,7 @@
 </p:notes>
 </file>
 
-<file path=ppt/notesSlides/notesSlide4.xml><?xml version="1.0" encoding="utf-8"?>
+<file path=ppt/notesSlides/notesSlide5.xml><?xml version="1.0" encoding="utf-8"?>
 <p:notes xmlns:a="http://schemas.openxmlformats.org/drawingml/2006/main" xmlns:r="http://schemas.openxmlformats.org/officeDocument/2006/relationships" xmlns:p="http://schemas.openxmlformats.org/presentationml/2006/main">
   <p:cSld>
     <p:spTree>
@@ -875,7 +984,7 @@
           <a:p>
             <a:fld id="{BA5DFA43-8D57-47FB-BC46-057616015C3B}" type="slidenum">
               <a:rPr lang="ko-KR" altLang="en-US" smtClean="0"/>
-              <a:t>5</a:t>
+              <a:t>6</a:t>
             </a:fld>
             <a:endParaRPr lang="ko-KR" altLang="en-US"/>
           </a:p>
@@ -894,7 +1003,7 @@
 </p:notes>
 </file>
 
-<file path=ppt/notesSlides/notesSlide5.xml><?xml version="1.0" encoding="utf-8"?>
+<file path=ppt/notesSlides/notesSlide6.xml><?xml version="1.0" encoding="utf-8"?>
 <p:notes xmlns:a="http://schemas.openxmlformats.org/drawingml/2006/main" xmlns:r="http://schemas.openxmlformats.org/officeDocument/2006/relationships" xmlns:p="http://schemas.openxmlformats.org/presentationml/2006/main">
   <p:cSld>
     <p:spTree>
@@ -983,7 +1092,7 @@
           <a:p>
             <a:fld id="{BA5DFA43-8D57-47FB-BC46-057616015C3B}" type="slidenum">
               <a:rPr lang="ko-KR" altLang="en-US" smtClean="0"/>
-              <a:t>6</a:t>
+              <a:t>7</a:t>
             </a:fld>
             <a:endParaRPr lang="ko-KR" altLang="en-US"/>
           </a:p>
@@ -1181,7 +1290,7 @@
           <a:p>
             <a:fld id="{FB30EDBD-1C2D-4C1E-B459-B60219FAB484}" type="datetimeFigureOut">
               <a:rPr lang="ko-KR" altLang="en-US" smtClean="0"/>
-              <a:t>2026. 10. 4.</a:t>
+              <a:t>2026. 10. 6.</a:t>
             </a:fld>
             <a:endParaRPr lang="ko-KR" altLang="en-US"/>
           </a:p>
@@ -1344,7 +1453,7 @@
           <a:p>
             <a:fld id="{FB30EDBD-1C2D-4C1E-B459-B60219FAB484}" type="datetimeFigureOut">
               <a:rPr lang="ko-KR" altLang="en-US" smtClean="0"/>
-              <a:t>2026. 10. 4.</a:t>
+              <a:t>2026. 10. 6.</a:t>
             </a:fld>
             <a:endParaRPr lang="ko-KR" altLang="en-US"/>
           </a:p>
@@ -1517,7 +1626,7 @@
           <a:p>
             <a:fld id="{FB30EDBD-1C2D-4C1E-B459-B60219FAB484}" type="datetimeFigureOut">
               <a:rPr lang="ko-KR" altLang="en-US" smtClean="0"/>
-              <a:t>2026. 10. 4.</a:t>
+              <a:t>2026. 10. 6.</a:t>
             </a:fld>
             <a:endParaRPr lang="ko-KR" altLang="en-US"/>
           </a:p>
@@ -1680,7 +1789,7 @@
           <a:p>
             <a:fld id="{FB30EDBD-1C2D-4C1E-B459-B60219FAB484}" type="datetimeFigureOut">
               <a:rPr lang="ko-KR" altLang="en-US" smtClean="0"/>
-              <a:t>2026. 10. 4.</a:t>
+              <a:t>2026. 10. 6.</a:t>
             </a:fld>
             <a:endParaRPr lang="ko-KR" altLang="en-US"/>
           </a:p>
@@ -1920,7 +2029,7 @@
           <a:p>
             <a:fld id="{FB30EDBD-1C2D-4C1E-B459-B60219FAB484}" type="datetimeFigureOut">
               <a:rPr lang="ko-KR" altLang="en-US" smtClean="0"/>
-              <a:t>2026. 10. 4.</a:t>
+              <a:t>2026. 10. 6.</a:t>
             </a:fld>
             <a:endParaRPr lang="ko-KR" altLang="en-US"/>
           </a:p>
@@ -2200,7 +2309,7 @@
           <a:p>
             <a:fld id="{FB30EDBD-1C2D-4C1E-B459-B60219FAB484}" type="datetimeFigureOut">
               <a:rPr lang="ko-KR" altLang="en-US" smtClean="0"/>
-              <a:t>2026. 10. 4.</a:t>
+              <a:t>2026. 10. 6.</a:t>
             </a:fld>
             <a:endParaRPr lang="ko-KR" altLang="en-US"/>
           </a:p>
@@ -2614,7 +2723,7 @@
           <a:p>
             <a:fld id="{FB30EDBD-1C2D-4C1E-B459-B60219FAB484}" type="datetimeFigureOut">
               <a:rPr lang="ko-KR" altLang="en-US" smtClean="0"/>
-              <a:t>2026. 10. 4.</a:t>
+              <a:t>2026. 10. 6.</a:t>
             </a:fld>
             <a:endParaRPr lang="ko-KR" altLang="en-US"/>
           </a:p>
@@ -2726,7 +2835,7 @@
           <a:p>
             <a:fld id="{FB30EDBD-1C2D-4C1E-B459-B60219FAB484}" type="datetimeFigureOut">
               <a:rPr lang="ko-KR" altLang="en-US" smtClean="0"/>
-              <a:t>2026. 10. 4.</a:t>
+              <a:t>2026. 10. 6.</a:t>
             </a:fld>
             <a:endParaRPr lang="ko-KR" altLang="en-US"/>
           </a:p>
@@ -2816,7 +2925,7 @@
           <a:p>
             <a:fld id="{FB30EDBD-1C2D-4C1E-B459-B60219FAB484}" type="datetimeFigureOut">
               <a:rPr lang="ko-KR" altLang="en-US" smtClean="0"/>
-              <a:t>2026. 10. 4.</a:t>
+              <a:t>2026. 10. 6.</a:t>
             </a:fld>
             <a:endParaRPr lang="ko-KR" altLang="en-US"/>
           </a:p>
@@ -3086,7 +3195,7 @@
           <a:p>
             <a:fld id="{FB30EDBD-1C2D-4C1E-B459-B60219FAB484}" type="datetimeFigureOut">
               <a:rPr lang="ko-KR" altLang="en-US" smtClean="0"/>
-              <a:t>2026. 10. 4.</a:t>
+              <a:t>2026. 10. 6.</a:t>
             </a:fld>
             <a:endParaRPr lang="ko-KR" altLang="en-US"/>
           </a:p>
@@ -3333,7 +3442,7 @@
           <a:p>
             <a:fld id="{FB30EDBD-1C2D-4C1E-B459-B60219FAB484}" type="datetimeFigureOut">
               <a:rPr lang="ko-KR" altLang="en-US" smtClean="0"/>
-              <a:t>2026. 10. 4.</a:t>
+              <a:t>2026. 10. 6.</a:t>
             </a:fld>
             <a:endParaRPr lang="ko-KR" altLang="en-US"/>
           </a:p>
@@ -3539,7 +3648,7 @@
           <a:p>
             <a:fld id="{FB30EDBD-1C2D-4C1E-B459-B60219FAB484}" type="datetimeFigureOut">
               <a:rPr lang="ko-KR" altLang="en-US" smtClean="0"/>
-              <a:t>2026. 10. 4.</a:t>
+              <a:t>2026. 10. 6.</a:t>
             </a:fld>
             <a:endParaRPr lang="ko-KR" altLang="en-US"/>
           </a:p>
@@ -3900,6 +4009,2700 @@
         <p:cNvPr id="1" name="">
           <a:extLst>
             <a:ext uri="{FF2B5EF4-FFF2-40B4-BE49-F238E27FC236}">
+              <a16:creationId xmlns:a16="http://schemas.microsoft.com/office/drawing/2014/main" id="{4AEF0DDD-36CA-CE36-0EC4-EC7183BC0C71}"/>
+            </a:ext>
+          </a:extLst>
+        </p:cNvPr>
+        <p:cNvGrpSpPr/>
+        <p:nvPr/>
+      </p:nvGrpSpPr>
+      <p:grpSpPr>
+        <a:xfrm>
+          <a:off x="0" y="0"/>
+          <a:ext cx="0" cy="0"/>
+          <a:chOff x="0" y="0"/>
+          <a:chExt cx="0" cy="0"/>
+        </a:xfrm>
+      </p:grpSpPr>
+      <p:sp>
+        <p:nvSpPr>
+          <p:cNvPr id="2" name="사각형: 둥근 모서리 12">
+            <a:extLst>
+              <a:ext uri="{FF2B5EF4-FFF2-40B4-BE49-F238E27FC236}">
+                <a16:creationId xmlns:a16="http://schemas.microsoft.com/office/drawing/2014/main" id="{D490BD92-8FB6-BC2F-2487-D45584002F4F}"/>
+              </a:ext>
+            </a:extLst>
+          </p:cNvPr>
+          <p:cNvSpPr/>
+          <p:nvPr/>
+        </p:nvSpPr>
+        <p:spPr>
+          <a:xfrm>
+            <a:off x="4716619" y="627001"/>
+            <a:ext cx="1139438" cy="451511"/>
+          </a:xfrm>
+          <a:prstGeom prst="roundRect">
+            <a:avLst>
+              <a:gd name="adj" fmla="val 14105"/>
+            </a:avLst>
+          </a:prstGeom>
+          <a:solidFill>
+            <a:schemeClr val="bg1">
+              <a:lumMod val="95000"/>
+            </a:schemeClr>
+          </a:solidFill>
+          <a:ln w="12700">
+            <a:headEnd type="none" w="med" len="med"/>
+            <a:tailEnd type="triangle" w="med" len="med"/>
+          </a:ln>
+        </p:spPr>
+        <p:style>
+          <a:lnRef idx="2">
+            <a:schemeClr val="dk1"/>
+          </a:lnRef>
+          <a:fillRef idx="1">
+            <a:schemeClr val="lt1"/>
+          </a:fillRef>
+          <a:effectRef idx="0">
+            <a:schemeClr val="dk1"/>
+          </a:effectRef>
+          <a:fontRef idx="minor">
+            <a:schemeClr val="dk1"/>
+          </a:fontRef>
+        </p:style>
+        <p:txBody>
+          <a:bodyPr rtlCol="0" anchor="ctr"/>
+          <a:lstStyle/>
+          <a:p>
+            <a:pPr algn="ctr"/>
+            <a:r>
+              <a:rPr lang="en-US" altLang="ko-KR" sz="900"/>
+              <a:t>Vendor</a:t>
+            </a:r>
+          </a:p>
+          <a:p>
+            <a:pPr algn="ctr"/>
+            <a:r>
+              <a:rPr lang="en-US" altLang="ko-KR" sz="900" b="1"/>
+              <a:t>GatewayClass</a:t>
+            </a:r>
+            <a:endParaRPr lang="ko-KR" altLang="en-US" sz="900" b="1" dirty="0"/>
+          </a:p>
+        </p:txBody>
+      </p:sp>
+      <p:sp>
+        <p:nvSpPr>
+          <p:cNvPr id="3" name="사각형: 둥근 모서리 70">
+            <a:extLst>
+              <a:ext uri="{FF2B5EF4-FFF2-40B4-BE49-F238E27FC236}">
+                <a16:creationId xmlns:a16="http://schemas.microsoft.com/office/drawing/2014/main" id="{63B05278-11DB-DCD0-1290-24C291AE7F77}"/>
+              </a:ext>
+            </a:extLst>
+          </p:cNvPr>
+          <p:cNvSpPr/>
+          <p:nvPr/>
+        </p:nvSpPr>
+        <p:spPr>
+          <a:xfrm>
+            <a:off x="1979712" y="1347614"/>
+            <a:ext cx="5304640" cy="1545936"/>
+          </a:xfrm>
+          <a:prstGeom prst="roundRect">
+            <a:avLst>
+              <a:gd name="adj" fmla="val 4874"/>
+            </a:avLst>
+          </a:prstGeom>
+          <a:noFill/>
+          <a:ln w="12700">
+            <a:prstDash val="solid"/>
+            <a:headEnd type="none" w="med" len="med"/>
+            <a:tailEnd type="triangle" w="med" len="med"/>
+          </a:ln>
+        </p:spPr>
+        <p:style>
+          <a:lnRef idx="2">
+            <a:schemeClr val="dk1"/>
+          </a:lnRef>
+          <a:fillRef idx="1">
+            <a:schemeClr val="lt1"/>
+          </a:fillRef>
+          <a:effectRef idx="0">
+            <a:schemeClr val="dk1"/>
+          </a:effectRef>
+          <a:fontRef idx="minor">
+            <a:schemeClr val="dk1"/>
+          </a:fontRef>
+        </p:style>
+        <p:txBody>
+          <a:bodyPr rtlCol="0" anchor="t"/>
+          <a:lstStyle/>
+          <a:p>
+            <a:r>
+              <a:rPr lang="en-US" altLang="ko-KR" sz="1000" dirty="0"/>
+              <a:t>Gateway </a:t>
+            </a:r>
+            <a:r>
+              <a:rPr lang="en-US" altLang="ko-KR" sz="1000" b="1" dirty="0"/>
+              <a:t>Namespace</a:t>
+            </a:r>
+            <a:endParaRPr lang="ko-KR" altLang="en-US" sz="1000" b="1" dirty="0"/>
+          </a:p>
+        </p:txBody>
+      </p:sp>
+      <p:sp>
+        <p:nvSpPr>
+          <p:cNvPr id="7" name="사각형: 둥근 모서리 12">
+            <a:extLst>
+              <a:ext uri="{FF2B5EF4-FFF2-40B4-BE49-F238E27FC236}">
+                <a16:creationId xmlns:a16="http://schemas.microsoft.com/office/drawing/2014/main" id="{B28BEAA5-3CEB-A395-C5A9-05EC2143F893}"/>
+              </a:ext>
+            </a:extLst>
+          </p:cNvPr>
+          <p:cNvSpPr/>
+          <p:nvPr/>
+        </p:nvSpPr>
+        <p:spPr>
+          <a:xfrm>
+            <a:off x="4716619" y="1647398"/>
+            <a:ext cx="1139438" cy="451511"/>
+          </a:xfrm>
+          <a:prstGeom prst="roundRect">
+            <a:avLst>
+              <a:gd name="adj" fmla="val 14105"/>
+            </a:avLst>
+          </a:prstGeom>
+          <a:solidFill>
+            <a:schemeClr val="bg1">
+              <a:lumMod val="95000"/>
+            </a:schemeClr>
+          </a:solidFill>
+          <a:ln w="12700">
+            <a:headEnd type="none" w="med" len="med"/>
+            <a:tailEnd type="triangle" w="med" len="med"/>
+          </a:ln>
+        </p:spPr>
+        <p:style>
+          <a:lnRef idx="2">
+            <a:schemeClr val="dk1"/>
+          </a:lnRef>
+          <a:fillRef idx="1">
+            <a:schemeClr val="lt1"/>
+          </a:fillRef>
+          <a:effectRef idx="0">
+            <a:schemeClr val="dk1"/>
+          </a:effectRef>
+          <a:fontRef idx="minor">
+            <a:schemeClr val="dk1"/>
+          </a:fontRef>
+        </p:style>
+        <p:txBody>
+          <a:bodyPr rtlCol="0" anchor="ctr"/>
+          <a:lstStyle/>
+          <a:p>
+            <a:pPr algn="ctr"/>
+            <a:r>
+              <a:rPr lang="en-US" altLang="ko-KR" sz="900"/>
+              <a:t>Gateway</a:t>
+            </a:r>
+          </a:p>
+          <a:p>
+            <a:pPr algn="ctr"/>
+            <a:r>
+              <a:rPr lang="en-US" altLang="ko-KR" sz="900" b="1"/>
+              <a:t>Gateway</a:t>
+            </a:r>
+            <a:endParaRPr lang="ko-KR" altLang="en-US" sz="900" b="1" dirty="0"/>
+          </a:p>
+        </p:txBody>
+      </p:sp>
+      <p:sp>
+        <p:nvSpPr>
+          <p:cNvPr id="9" name="사각형: 둥근 모서리 70">
+            <a:extLst>
+              <a:ext uri="{FF2B5EF4-FFF2-40B4-BE49-F238E27FC236}">
+                <a16:creationId xmlns:a16="http://schemas.microsoft.com/office/drawing/2014/main" id="{9D98C9B0-1F04-35AD-8C01-2B3AEC5723A2}"/>
+              </a:ext>
+            </a:extLst>
+          </p:cNvPr>
+          <p:cNvSpPr/>
+          <p:nvPr/>
+        </p:nvSpPr>
+        <p:spPr>
+          <a:xfrm>
+            <a:off x="637634" y="3080388"/>
+            <a:ext cx="7979316" cy="1570426"/>
+          </a:xfrm>
+          <a:prstGeom prst="roundRect">
+            <a:avLst>
+              <a:gd name="adj" fmla="val 4279"/>
+            </a:avLst>
+          </a:prstGeom>
+          <a:noFill/>
+          <a:ln w="12700">
+            <a:prstDash val="solid"/>
+            <a:headEnd type="none" w="med" len="med"/>
+            <a:tailEnd type="triangle" w="med" len="med"/>
+          </a:ln>
+        </p:spPr>
+        <p:style>
+          <a:lnRef idx="2">
+            <a:schemeClr val="dk1"/>
+          </a:lnRef>
+          <a:fillRef idx="1">
+            <a:schemeClr val="lt1"/>
+          </a:fillRef>
+          <a:effectRef idx="0">
+            <a:schemeClr val="dk1"/>
+          </a:effectRef>
+          <a:fontRef idx="minor">
+            <a:schemeClr val="dk1"/>
+          </a:fontRef>
+        </p:style>
+        <p:txBody>
+          <a:bodyPr rtlCol="0" anchor="t"/>
+          <a:lstStyle/>
+          <a:p>
+            <a:r>
+              <a:rPr lang="en-US" altLang="ko-KR" sz="1000" dirty="0"/>
+              <a:t>LLM </a:t>
+            </a:r>
+            <a:r>
+              <a:rPr lang="en-US" altLang="ko-KR" sz="1000" b="1" dirty="0"/>
+              <a:t>Namespace</a:t>
+            </a:r>
+            <a:endParaRPr lang="ko-KR" altLang="en-US" sz="1000" b="1" dirty="0"/>
+          </a:p>
+        </p:txBody>
+      </p:sp>
+      <p:sp>
+        <p:nvSpPr>
+          <p:cNvPr id="12" name="사각형: 둥근 모서리 12">
+            <a:extLst>
+              <a:ext uri="{FF2B5EF4-FFF2-40B4-BE49-F238E27FC236}">
+                <a16:creationId xmlns:a16="http://schemas.microsoft.com/office/drawing/2014/main" id="{F845AA27-087A-4131-9DC7-18294673F567}"/>
+              </a:ext>
+            </a:extLst>
+          </p:cNvPr>
+          <p:cNvSpPr/>
+          <p:nvPr/>
+        </p:nvSpPr>
+        <p:spPr>
+          <a:xfrm>
+            <a:off x="3400055" y="1647397"/>
+            <a:ext cx="1139438" cy="451511"/>
+          </a:xfrm>
+          <a:prstGeom prst="roundRect">
+            <a:avLst>
+              <a:gd name="adj" fmla="val 14105"/>
+            </a:avLst>
+          </a:prstGeom>
+          <a:noFill/>
+          <a:ln w="12700">
+            <a:headEnd type="none" w="med" len="med"/>
+            <a:tailEnd type="triangle" w="med" len="med"/>
+          </a:ln>
+        </p:spPr>
+        <p:style>
+          <a:lnRef idx="2">
+            <a:schemeClr val="dk1"/>
+          </a:lnRef>
+          <a:fillRef idx="1">
+            <a:schemeClr val="lt1"/>
+          </a:fillRef>
+          <a:effectRef idx="0">
+            <a:schemeClr val="dk1"/>
+          </a:effectRef>
+          <a:fontRef idx="minor">
+            <a:schemeClr val="dk1"/>
+          </a:fontRef>
+        </p:style>
+        <p:txBody>
+          <a:bodyPr rtlCol="0" anchor="ctr"/>
+          <a:lstStyle/>
+          <a:p>
+            <a:pPr algn="ctr"/>
+            <a:r>
+              <a:rPr lang="en-US" altLang="ko-KR" sz="900"/>
+              <a:t>Gateway </a:t>
+            </a:r>
+            <a:br>
+              <a:rPr lang="en-US" altLang="ko-KR" sz="900"/>
+            </a:br>
+            <a:r>
+              <a:rPr lang="en-US" altLang="ko-KR" sz="900" b="1" dirty="0"/>
+              <a:t>Service (LB)</a:t>
+            </a:r>
+            <a:endParaRPr lang="ko-KR" altLang="en-US" sz="900" b="1" dirty="0"/>
+          </a:p>
+        </p:txBody>
+      </p:sp>
+      <p:sp>
+        <p:nvSpPr>
+          <p:cNvPr id="14" name="사각형: 둥근 모서리 12">
+            <a:extLst>
+              <a:ext uri="{FF2B5EF4-FFF2-40B4-BE49-F238E27FC236}">
+                <a16:creationId xmlns:a16="http://schemas.microsoft.com/office/drawing/2014/main" id="{2265C739-5418-914B-2914-2AC6D40AC382}"/>
+              </a:ext>
+            </a:extLst>
+          </p:cNvPr>
+          <p:cNvSpPr/>
+          <p:nvPr/>
+        </p:nvSpPr>
+        <p:spPr>
+          <a:xfrm>
+            <a:off x="2090078" y="2348017"/>
+            <a:ext cx="1139438" cy="451511"/>
+          </a:xfrm>
+          <a:prstGeom prst="roundRect">
+            <a:avLst>
+              <a:gd name="adj" fmla="val 14105"/>
+            </a:avLst>
+          </a:prstGeom>
+          <a:noFill/>
+          <a:ln w="12700">
+            <a:headEnd type="none" w="med" len="med"/>
+            <a:tailEnd type="triangle" w="med" len="med"/>
+          </a:ln>
+        </p:spPr>
+        <p:style>
+          <a:lnRef idx="2">
+            <a:schemeClr val="dk1"/>
+          </a:lnRef>
+          <a:fillRef idx="1">
+            <a:schemeClr val="lt1"/>
+          </a:fillRef>
+          <a:effectRef idx="0">
+            <a:schemeClr val="dk1"/>
+          </a:effectRef>
+          <a:fontRef idx="minor">
+            <a:schemeClr val="dk1"/>
+          </a:fontRef>
+        </p:style>
+        <p:txBody>
+          <a:bodyPr rtlCol="0" anchor="ctr"/>
+          <a:lstStyle/>
+          <a:p>
+            <a:pPr algn="ctr"/>
+            <a:r>
+              <a:rPr lang="en-US" altLang="ko-KR" sz="900"/>
+              <a:t>Gateway</a:t>
+            </a:r>
+            <a:br>
+              <a:rPr lang="en-US" altLang="ko-KR" sz="900" dirty="0"/>
+            </a:br>
+            <a:r>
+              <a:rPr lang="en-US" altLang="ko-KR" sz="900" b="1" dirty="0"/>
+              <a:t>Deployment</a:t>
+            </a:r>
+            <a:endParaRPr lang="ko-KR" altLang="en-US" sz="900" b="1" dirty="0"/>
+          </a:p>
+        </p:txBody>
+      </p:sp>
+      <p:sp>
+        <p:nvSpPr>
+          <p:cNvPr id="15" name="사각형: 둥근 모서리 12">
+            <a:extLst>
+              <a:ext uri="{FF2B5EF4-FFF2-40B4-BE49-F238E27FC236}">
+                <a16:creationId xmlns:a16="http://schemas.microsoft.com/office/drawing/2014/main" id="{65766B65-2BEB-134A-430B-53BC0FF293CE}"/>
+              </a:ext>
+            </a:extLst>
+          </p:cNvPr>
+          <p:cNvSpPr/>
+          <p:nvPr/>
+        </p:nvSpPr>
+        <p:spPr>
+          <a:xfrm>
+            <a:off x="3405356" y="3392007"/>
+            <a:ext cx="1139438" cy="451511"/>
+          </a:xfrm>
+          <a:prstGeom prst="roundRect">
+            <a:avLst>
+              <a:gd name="adj" fmla="val 14105"/>
+            </a:avLst>
+          </a:prstGeom>
+          <a:solidFill>
+            <a:schemeClr val="bg1">
+              <a:lumMod val="95000"/>
+            </a:schemeClr>
+          </a:solidFill>
+          <a:ln w="12700">
+            <a:headEnd type="none" w="med" len="med"/>
+            <a:tailEnd type="triangle" w="med" len="med"/>
+          </a:ln>
+        </p:spPr>
+        <p:style>
+          <a:lnRef idx="2">
+            <a:schemeClr val="dk1"/>
+          </a:lnRef>
+          <a:fillRef idx="1">
+            <a:schemeClr val="lt1"/>
+          </a:fillRef>
+          <a:effectRef idx="0">
+            <a:schemeClr val="dk1"/>
+          </a:effectRef>
+          <a:fontRef idx="minor">
+            <a:schemeClr val="dk1"/>
+          </a:fontRef>
+        </p:style>
+        <p:txBody>
+          <a:bodyPr rtlCol="0" anchor="ctr"/>
+          <a:lstStyle/>
+          <a:p>
+            <a:pPr algn="ctr"/>
+            <a:r>
+              <a:rPr lang="en-US" altLang="ko-KR" sz="900"/>
+              <a:t>Model A</a:t>
+            </a:r>
+          </a:p>
+          <a:p>
+            <a:pPr algn="ctr"/>
+            <a:r>
+              <a:rPr lang="en-US" altLang="ko-KR" sz="900" b="1"/>
+              <a:t>HTTPRoute</a:t>
+            </a:r>
+            <a:endParaRPr lang="ko-KR" altLang="en-US" sz="900" b="1" dirty="0"/>
+          </a:p>
+        </p:txBody>
+      </p:sp>
+      <p:sp>
+        <p:nvSpPr>
+          <p:cNvPr id="21" name="사각형: 둥근 모서리 12">
+            <a:extLst>
+              <a:ext uri="{FF2B5EF4-FFF2-40B4-BE49-F238E27FC236}">
+                <a16:creationId xmlns:a16="http://schemas.microsoft.com/office/drawing/2014/main" id="{EC496D23-55EA-4F73-A294-8C0070CC2F60}"/>
+              </a:ext>
+            </a:extLst>
+          </p:cNvPr>
+          <p:cNvSpPr/>
+          <p:nvPr/>
+        </p:nvSpPr>
+        <p:spPr>
+          <a:xfrm>
+            <a:off x="2090078" y="4105152"/>
+            <a:ext cx="1139438" cy="451511"/>
+          </a:xfrm>
+          <a:prstGeom prst="roundRect">
+            <a:avLst>
+              <a:gd name="adj" fmla="val 14105"/>
+            </a:avLst>
+          </a:prstGeom>
+          <a:noFill/>
+          <a:ln w="12700">
+            <a:headEnd type="none" w="med" len="med"/>
+            <a:tailEnd type="triangle" w="med" len="med"/>
+          </a:ln>
+        </p:spPr>
+        <p:style>
+          <a:lnRef idx="2">
+            <a:schemeClr val="dk1"/>
+          </a:lnRef>
+          <a:fillRef idx="1">
+            <a:schemeClr val="lt1"/>
+          </a:fillRef>
+          <a:effectRef idx="0">
+            <a:schemeClr val="dk1"/>
+          </a:effectRef>
+          <a:fontRef idx="minor">
+            <a:schemeClr val="dk1"/>
+          </a:fontRef>
+        </p:style>
+        <p:txBody>
+          <a:bodyPr rtlCol="0" anchor="ctr"/>
+          <a:lstStyle/>
+          <a:p>
+            <a:pPr algn="ctr"/>
+            <a:r>
+              <a:rPr lang="en-US" altLang="ko-KR" sz="900"/>
+              <a:t>Model A</a:t>
+            </a:r>
+          </a:p>
+          <a:p>
+            <a:pPr algn="ctr"/>
+            <a:r>
+              <a:rPr lang="en-US" altLang="ko-KR" sz="900" b="1" dirty="0"/>
+              <a:t>Deployment</a:t>
+            </a:r>
+            <a:endParaRPr lang="ko-KR" altLang="en-US" sz="900" b="1" dirty="0"/>
+          </a:p>
+        </p:txBody>
+      </p:sp>
+      <p:sp>
+        <p:nvSpPr>
+          <p:cNvPr id="22" name="사각형: 둥근 모서리 12">
+            <a:extLst>
+              <a:ext uri="{FF2B5EF4-FFF2-40B4-BE49-F238E27FC236}">
+                <a16:creationId xmlns:a16="http://schemas.microsoft.com/office/drawing/2014/main" id="{09C2B79C-3E5A-1947-B023-15DD2F67CFB8}"/>
+              </a:ext>
+            </a:extLst>
+          </p:cNvPr>
+          <p:cNvSpPr/>
+          <p:nvPr/>
+        </p:nvSpPr>
+        <p:spPr>
+          <a:xfrm>
+            <a:off x="3398691" y="631230"/>
+            <a:ext cx="1139438" cy="451511"/>
+          </a:xfrm>
+          <a:prstGeom prst="roundRect">
+            <a:avLst>
+              <a:gd name="adj" fmla="val 14105"/>
+            </a:avLst>
+          </a:prstGeom>
+          <a:noFill/>
+          <a:ln w="12700">
+            <a:headEnd type="none" w="med" len="med"/>
+            <a:tailEnd type="triangle" w="med" len="med"/>
+          </a:ln>
+        </p:spPr>
+        <p:style>
+          <a:lnRef idx="2">
+            <a:schemeClr val="dk1"/>
+          </a:lnRef>
+          <a:fillRef idx="1">
+            <a:schemeClr val="lt1"/>
+          </a:fillRef>
+          <a:effectRef idx="0">
+            <a:schemeClr val="dk1"/>
+          </a:effectRef>
+          <a:fontRef idx="minor">
+            <a:schemeClr val="dk1"/>
+          </a:fontRef>
+        </p:style>
+        <p:txBody>
+          <a:bodyPr rtlCol="0" anchor="ctr"/>
+          <a:lstStyle/>
+          <a:p>
+            <a:pPr algn="ctr"/>
+            <a:r>
+              <a:rPr lang="en-US" altLang="ko-KR" sz="900" dirty="0"/>
+              <a:t>Client</a:t>
+            </a:r>
+            <a:endParaRPr lang="ko-KR" altLang="en-US" sz="900" dirty="0"/>
+          </a:p>
+        </p:txBody>
+      </p:sp>
+      <p:cxnSp>
+        <p:nvCxnSpPr>
+          <p:cNvPr id="23" name="직선 화살표 연결선 96">
+            <a:extLst>
+              <a:ext uri="{FF2B5EF4-FFF2-40B4-BE49-F238E27FC236}">
+                <a16:creationId xmlns:a16="http://schemas.microsoft.com/office/drawing/2014/main" id="{E240BADA-F3B0-A47E-20C0-876BF082E708}"/>
+              </a:ext>
+            </a:extLst>
+          </p:cNvPr>
+          <p:cNvCxnSpPr>
+            <a:cxnSpLocks/>
+            <a:stCxn id="22" idx="2"/>
+          </p:cNvCxnSpPr>
+          <p:nvPr/>
+        </p:nvCxnSpPr>
+        <p:spPr>
+          <a:xfrm>
+            <a:off x="3968410" y="1082741"/>
+            <a:ext cx="1364" cy="564656"/>
+          </a:xfrm>
+          <a:prstGeom prst="straightConnector1">
+            <a:avLst/>
+          </a:prstGeom>
+          <a:ln w="12700">
+            <a:solidFill>
+              <a:srgbClr val="C00000"/>
+            </a:solidFill>
+            <a:prstDash val="solid"/>
+            <a:headEnd type="none" w="med" len="med"/>
+            <a:tailEnd type="triangle" w="med" len="med"/>
+          </a:ln>
+        </p:spPr>
+        <p:style>
+          <a:lnRef idx="1">
+            <a:schemeClr val="accent1"/>
+          </a:lnRef>
+          <a:fillRef idx="0">
+            <a:schemeClr val="accent1"/>
+          </a:fillRef>
+          <a:effectRef idx="0">
+            <a:schemeClr val="accent1"/>
+          </a:effectRef>
+          <a:fontRef idx="minor">
+            <a:schemeClr val="tx1"/>
+          </a:fontRef>
+        </p:style>
+      </p:cxnSp>
+      <p:cxnSp>
+        <p:nvCxnSpPr>
+          <p:cNvPr id="24" name="직선 화살표 연결선 96">
+            <a:extLst>
+              <a:ext uri="{FF2B5EF4-FFF2-40B4-BE49-F238E27FC236}">
+                <a16:creationId xmlns:a16="http://schemas.microsoft.com/office/drawing/2014/main" id="{465C7D6F-2D89-F02B-270E-1ED8E1A879AB}"/>
+              </a:ext>
+            </a:extLst>
+          </p:cNvPr>
+          <p:cNvCxnSpPr>
+            <a:cxnSpLocks/>
+            <a:stCxn id="7" idx="0"/>
+            <a:endCxn id="2" idx="2"/>
+          </p:cNvCxnSpPr>
+          <p:nvPr/>
+        </p:nvCxnSpPr>
+        <p:spPr>
+          <a:xfrm flipV="1">
+            <a:off x="5286338" y="1078512"/>
+            <a:ext cx="0" cy="568886"/>
+          </a:xfrm>
+          <a:prstGeom prst="straightConnector1">
+            <a:avLst/>
+          </a:prstGeom>
+          <a:ln w="12700">
+            <a:solidFill>
+              <a:schemeClr val="tx1"/>
+            </a:solidFill>
+            <a:prstDash val="solid"/>
+            <a:headEnd type="none" w="med" len="med"/>
+            <a:tailEnd type="triangle" w="med" len="med"/>
+          </a:ln>
+        </p:spPr>
+        <p:style>
+          <a:lnRef idx="1">
+            <a:schemeClr val="accent1"/>
+          </a:lnRef>
+          <a:fillRef idx="0">
+            <a:schemeClr val="accent1"/>
+          </a:fillRef>
+          <a:effectRef idx="0">
+            <a:schemeClr val="accent1"/>
+          </a:effectRef>
+          <a:fontRef idx="minor">
+            <a:schemeClr val="tx1"/>
+          </a:fontRef>
+        </p:style>
+      </p:cxnSp>
+      <p:cxnSp>
+        <p:nvCxnSpPr>
+          <p:cNvPr id="30" name="직선 화살표 연결선 96">
+            <a:extLst>
+              <a:ext uri="{FF2B5EF4-FFF2-40B4-BE49-F238E27FC236}">
+                <a16:creationId xmlns:a16="http://schemas.microsoft.com/office/drawing/2014/main" id="{83CFD470-A71E-70B0-4FC0-C8B85C0455A6}"/>
+              </a:ext>
+            </a:extLst>
+          </p:cNvPr>
+          <p:cNvCxnSpPr>
+            <a:cxnSpLocks/>
+            <a:stCxn id="12" idx="2"/>
+            <a:endCxn id="14" idx="0"/>
+          </p:cNvCxnSpPr>
+          <p:nvPr/>
+        </p:nvCxnSpPr>
+        <p:spPr>
+          <a:xfrm flipH="1">
+            <a:off x="2659797" y="2098908"/>
+            <a:ext cx="1309977" cy="249109"/>
+          </a:xfrm>
+          <a:prstGeom prst="straightConnector1">
+            <a:avLst/>
+          </a:prstGeom>
+          <a:ln w="12700">
+            <a:solidFill>
+              <a:srgbClr val="C00000"/>
+            </a:solidFill>
+            <a:prstDash val="solid"/>
+            <a:headEnd type="none" w="med" len="med"/>
+            <a:tailEnd type="triangle" w="med" len="med"/>
+          </a:ln>
+        </p:spPr>
+        <p:style>
+          <a:lnRef idx="1">
+            <a:schemeClr val="accent1"/>
+          </a:lnRef>
+          <a:fillRef idx="0">
+            <a:schemeClr val="accent1"/>
+          </a:fillRef>
+          <a:effectRef idx="0">
+            <a:schemeClr val="accent1"/>
+          </a:effectRef>
+          <a:fontRef idx="minor">
+            <a:schemeClr val="tx1"/>
+          </a:fontRef>
+        </p:style>
+      </p:cxnSp>
+      <p:cxnSp>
+        <p:nvCxnSpPr>
+          <p:cNvPr id="34" name="직선 화살표 연결선 96">
+            <a:extLst>
+              <a:ext uri="{FF2B5EF4-FFF2-40B4-BE49-F238E27FC236}">
+                <a16:creationId xmlns:a16="http://schemas.microsoft.com/office/drawing/2014/main" id="{D62AE8CD-39C6-A4D2-7542-F6C144379C9E}"/>
+              </a:ext>
+            </a:extLst>
+          </p:cNvPr>
+          <p:cNvCxnSpPr>
+            <a:cxnSpLocks/>
+            <a:stCxn id="2" idx="3"/>
+          </p:cNvCxnSpPr>
+          <p:nvPr/>
+        </p:nvCxnSpPr>
+        <p:spPr>
+          <a:xfrm>
+            <a:off x="5856057" y="852757"/>
+            <a:ext cx="174476" cy="4519"/>
+          </a:xfrm>
+          <a:prstGeom prst="straightConnector1">
+            <a:avLst/>
+          </a:prstGeom>
+          <a:ln w="12700">
+            <a:solidFill>
+              <a:schemeClr val="tx1"/>
+            </a:solidFill>
+            <a:prstDash val="solid"/>
+            <a:headEnd type="none" w="med" len="med"/>
+            <a:tailEnd type="triangle" w="med" len="med"/>
+          </a:ln>
+        </p:spPr>
+        <p:style>
+          <a:lnRef idx="1">
+            <a:schemeClr val="accent1"/>
+          </a:lnRef>
+          <a:fillRef idx="0">
+            <a:schemeClr val="accent1"/>
+          </a:fillRef>
+          <a:effectRef idx="0">
+            <a:schemeClr val="accent1"/>
+          </a:effectRef>
+          <a:fontRef idx="minor">
+            <a:schemeClr val="tx1"/>
+          </a:fontRef>
+        </p:style>
+      </p:cxnSp>
+      <p:cxnSp>
+        <p:nvCxnSpPr>
+          <p:cNvPr id="43" name="직선 화살표 연결선 96">
+            <a:extLst>
+              <a:ext uri="{FF2B5EF4-FFF2-40B4-BE49-F238E27FC236}">
+                <a16:creationId xmlns:a16="http://schemas.microsoft.com/office/drawing/2014/main" id="{B281111B-DE7A-A5DE-0C9D-17AD6BC996DC}"/>
+              </a:ext>
+            </a:extLst>
+          </p:cNvPr>
+          <p:cNvCxnSpPr>
+            <a:cxnSpLocks/>
+            <a:stCxn id="15" idx="0"/>
+            <a:endCxn id="7" idx="2"/>
+          </p:cNvCxnSpPr>
+          <p:nvPr/>
+        </p:nvCxnSpPr>
+        <p:spPr>
+          <a:xfrm flipV="1">
+            <a:off x="3975075" y="2098909"/>
+            <a:ext cx="1311263" cy="1293098"/>
+          </a:xfrm>
+          <a:prstGeom prst="straightConnector1">
+            <a:avLst/>
+          </a:prstGeom>
+          <a:ln w="12700">
+            <a:solidFill>
+              <a:schemeClr val="tx1"/>
+            </a:solidFill>
+            <a:prstDash val="solid"/>
+            <a:headEnd type="none" w="med" len="med"/>
+            <a:tailEnd type="triangle" w="med" len="med"/>
+          </a:ln>
+        </p:spPr>
+        <p:style>
+          <a:lnRef idx="1">
+            <a:schemeClr val="accent1"/>
+          </a:lnRef>
+          <a:fillRef idx="0">
+            <a:schemeClr val="accent1"/>
+          </a:fillRef>
+          <a:effectRef idx="0">
+            <a:schemeClr val="accent1"/>
+          </a:effectRef>
+          <a:fontRef idx="minor">
+            <a:schemeClr val="tx1"/>
+          </a:fontRef>
+        </p:style>
+      </p:cxnSp>
+      <p:cxnSp>
+        <p:nvCxnSpPr>
+          <p:cNvPr id="49" name="직선 화살표 연결선 96">
+            <a:extLst>
+              <a:ext uri="{FF2B5EF4-FFF2-40B4-BE49-F238E27FC236}">
+                <a16:creationId xmlns:a16="http://schemas.microsoft.com/office/drawing/2014/main" id="{46226E7E-E206-30BF-A6BC-FDF3EC4B4E50}"/>
+              </a:ext>
+            </a:extLst>
+          </p:cNvPr>
+          <p:cNvCxnSpPr>
+            <a:cxnSpLocks/>
+            <a:stCxn id="15" idx="2"/>
+            <a:endCxn id="91" idx="0"/>
+          </p:cNvCxnSpPr>
+          <p:nvPr/>
+        </p:nvCxnSpPr>
+        <p:spPr>
+          <a:xfrm>
+            <a:off x="3975075" y="3843518"/>
+            <a:ext cx="1287" cy="261633"/>
+          </a:xfrm>
+          <a:prstGeom prst="straightConnector1">
+            <a:avLst/>
+          </a:prstGeom>
+          <a:ln w="12700">
+            <a:solidFill>
+              <a:schemeClr val="tx1"/>
+            </a:solidFill>
+            <a:prstDash val="solid"/>
+            <a:headEnd type="none" w="med" len="med"/>
+            <a:tailEnd type="triangle" w="med" len="med"/>
+          </a:ln>
+        </p:spPr>
+        <p:style>
+          <a:lnRef idx="1">
+            <a:schemeClr val="accent1"/>
+          </a:lnRef>
+          <a:fillRef idx="0">
+            <a:schemeClr val="accent1"/>
+          </a:fillRef>
+          <a:effectRef idx="0">
+            <a:schemeClr val="accent1"/>
+          </a:effectRef>
+          <a:fontRef idx="minor">
+            <a:schemeClr val="tx1"/>
+          </a:fontRef>
+        </p:style>
+      </p:cxnSp>
+      <p:cxnSp>
+        <p:nvCxnSpPr>
+          <p:cNvPr id="56" name="직선 화살표 연결선 96">
+            <a:extLst>
+              <a:ext uri="{FF2B5EF4-FFF2-40B4-BE49-F238E27FC236}">
+                <a16:creationId xmlns:a16="http://schemas.microsoft.com/office/drawing/2014/main" id="{83DF10BE-532F-13D5-743E-E456EF256B33}"/>
+              </a:ext>
+            </a:extLst>
+          </p:cNvPr>
+          <p:cNvCxnSpPr>
+            <a:cxnSpLocks/>
+            <a:stCxn id="14" idx="2"/>
+            <a:endCxn id="21" idx="0"/>
+          </p:cNvCxnSpPr>
+          <p:nvPr/>
+        </p:nvCxnSpPr>
+        <p:spPr>
+          <a:xfrm>
+            <a:off x="2659797" y="2799528"/>
+            <a:ext cx="0" cy="1305624"/>
+          </a:xfrm>
+          <a:prstGeom prst="straightConnector1">
+            <a:avLst/>
+          </a:prstGeom>
+          <a:ln w="12700">
+            <a:solidFill>
+              <a:srgbClr val="C00000"/>
+            </a:solidFill>
+            <a:prstDash val="solid"/>
+            <a:headEnd type="none" w="med" len="med"/>
+            <a:tailEnd type="triangle" w="med" len="med"/>
+          </a:ln>
+        </p:spPr>
+        <p:style>
+          <a:lnRef idx="1">
+            <a:schemeClr val="accent1"/>
+          </a:lnRef>
+          <a:fillRef idx="0">
+            <a:schemeClr val="accent1"/>
+          </a:fillRef>
+          <a:effectRef idx="0">
+            <a:schemeClr val="accent1"/>
+          </a:effectRef>
+          <a:fontRef idx="minor">
+            <a:schemeClr val="tx1"/>
+          </a:fontRef>
+        </p:style>
+      </p:cxnSp>
+      <p:cxnSp>
+        <p:nvCxnSpPr>
+          <p:cNvPr id="68" name="직선 화살표 연결선 96">
+            <a:extLst>
+              <a:ext uri="{FF2B5EF4-FFF2-40B4-BE49-F238E27FC236}">
+                <a16:creationId xmlns:a16="http://schemas.microsoft.com/office/drawing/2014/main" id="{EB80B0F6-7350-F226-0F72-60E6227E0497}"/>
+              </a:ext>
+            </a:extLst>
+          </p:cNvPr>
+          <p:cNvCxnSpPr>
+            <a:cxnSpLocks/>
+            <a:stCxn id="4" idx="2"/>
+            <a:endCxn id="12" idx="0"/>
+          </p:cNvCxnSpPr>
+          <p:nvPr/>
+        </p:nvCxnSpPr>
+        <p:spPr>
+          <a:xfrm flipH="1">
+            <a:off x="3969774" y="1081483"/>
+            <a:ext cx="2630478" cy="565914"/>
+          </a:xfrm>
+          <a:prstGeom prst="straightConnector1">
+            <a:avLst/>
+          </a:prstGeom>
+          <a:ln w="12700">
+            <a:solidFill>
+              <a:schemeClr val="accent3"/>
+            </a:solidFill>
+            <a:prstDash val="solid"/>
+            <a:headEnd type="none" w="med" len="med"/>
+            <a:tailEnd type="triangle" w="med" len="med"/>
+          </a:ln>
+        </p:spPr>
+        <p:style>
+          <a:lnRef idx="1">
+            <a:schemeClr val="accent1"/>
+          </a:lnRef>
+          <a:fillRef idx="0">
+            <a:schemeClr val="accent1"/>
+          </a:fillRef>
+          <a:effectRef idx="0">
+            <a:schemeClr val="accent1"/>
+          </a:effectRef>
+          <a:fontRef idx="minor">
+            <a:schemeClr val="tx1"/>
+          </a:fontRef>
+        </p:style>
+      </p:cxnSp>
+      <p:cxnSp>
+        <p:nvCxnSpPr>
+          <p:cNvPr id="73" name="직선 화살표 연결선 96">
+            <a:extLst>
+              <a:ext uri="{FF2B5EF4-FFF2-40B4-BE49-F238E27FC236}">
+                <a16:creationId xmlns:a16="http://schemas.microsoft.com/office/drawing/2014/main" id="{EA375EC4-90AF-FCCB-D578-81EC050899FB}"/>
+              </a:ext>
+            </a:extLst>
+          </p:cNvPr>
+          <p:cNvCxnSpPr>
+            <a:cxnSpLocks/>
+            <a:stCxn id="4" idx="2"/>
+            <a:endCxn id="14" idx="0"/>
+          </p:cNvCxnSpPr>
+          <p:nvPr/>
+        </p:nvCxnSpPr>
+        <p:spPr>
+          <a:xfrm flipH="1">
+            <a:off x="2659797" y="1081483"/>
+            <a:ext cx="3940455" cy="1266534"/>
+          </a:xfrm>
+          <a:prstGeom prst="straightConnector1">
+            <a:avLst/>
+          </a:prstGeom>
+          <a:ln w="12700">
+            <a:solidFill>
+              <a:schemeClr val="accent3"/>
+            </a:solidFill>
+            <a:prstDash val="solid"/>
+            <a:headEnd type="none" w="med" len="med"/>
+            <a:tailEnd type="triangle" w="med" len="med"/>
+          </a:ln>
+        </p:spPr>
+        <p:style>
+          <a:lnRef idx="1">
+            <a:schemeClr val="accent1"/>
+          </a:lnRef>
+          <a:fillRef idx="0">
+            <a:schemeClr val="accent1"/>
+          </a:fillRef>
+          <a:effectRef idx="0">
+            <a:schemeClr val="accent1"/>
+          </a:effectRef>
+          <a:fontRef idx="minor">
+            <a:schemeClr val="tx1"/>
+          </a:fontRef>
+        </p:style>
+      </p:cxnSp>
+      <p:sp>
+        <p:nvSpPr>
+          <p:cNvPr id="79" name="사각형: 둥근 모서리 12">
+            <a:extLst>
+              <a:ext uri="{FF2B5EF4-FFF2-40B4-BE49-F238E27FC236}">
+                <a16:creationId xmlns:a16="http://schemas.microsoft.com/office/drawing/2014/main" id="{877676A1-E515-3DAC-D7D3-DCBE1A2F89F0}"/>
+              </a:ext>
+            </a:extLst>
+          </p:cNvPr>
+          <p:cNvSpPr/>
+          <p:nvPr/>
+        </p:nvSpPr>
+        <p:spPr>
+          <a:xfrm>
+            <a:off x="773513" y="4105151"/>
+            <a:ext cx="1139438" cy="451511"/>
+          </a:xfrm>
+          <a:prstGeom prst="roundRect">
+            <a:avLst>
+              <a:gd name="adj" fmla="val 14105"/>
+            </a:avLst>
+          </a:prstGeom>
+          <a:noFill/>
+          <a:ln w="12700">
+            <a:headEnd type="none" w="med" len="med"/>
+            <a:tailEnd type="triangle" w="med" len="med"/>
+          </a:ln>
+        </p:spPr>
+        <p:style>
+          <a:lnRef idx="2">
+            <a:schemeClr val="dk1"/>
+          </a:lnRef>
+          <a:fillRef idx="1">
+            <a:schemeClr val="lt1"/>
+          </a:fillRef>
+          <a:effectRef idx="0">
+            <a:schemeClr val="dk1"/>
+          </a:effectRef>
+          <a:fontRef idx="minor">
+            <a:schemeClr val="dk1"/>
+          </a:fontRef>
+        </p:style>
+        <p:txBody>
+          <a:bodyPr rtlCol="0" anchor="ctr"/>
+          <a:lstStyle/>
+          <a:p>
+            <a:pPr algn="ctr"/>
+            <a:r>
+              <a:rPr lang="en-US" altLang="ko-KR" sz="900"/>
+              <a:t>Model A EPP</a:t>
+            </a:r>
+          </a:p>
+          <a:p>
+            <a:pPr algn="ctr"/>
+            <a:r>
+              <a:rPr lang="en-US" altLang="ko-KR" sz="900" b="1" dirty="0"/>
+              <a:t>Deployment</a:t>
+            </a:r>
+            <a:endParaRPr lang="ko-KR" altLang="en-US" sz="900" b="1" dirty="0"/>
+          </a:p>
+        </p:txBody>
+      </p:sp>
+      <p:cxnSp>
+        <p:nvCxnSpPr>
+          <p:cNvPr id="80" name="직선 화살표 연결선 96">
+            <a:extLst>
+              <a:ext uri="{FF2B5EF4-FFF2-40B4-BE49-F238E27FC236}">
+                <a16:creationId xmlns:a16="http://schemas.microsoft.com/office/drawing/2014/main" id="{FC65AF40-58FB-569C-37DD-5EB00DDDE5A2}"/>
+              </a:ext>
+            </a:extLst>
+          </p:cNvPr>
+          <p:cNvCxnSpPr>
+            <a:cxnSpLocks/>
+            <a:stCxn id="79" idx="3"/>
+            <a:endCxn id="21" idx="1"/>
+          </p:cNvCxnSpPr>
+          <p:nvPr/>
+        </p:nvCxnSpPr>
+        <p:spPr>
+          <a:xfrm>
+            <a:off x="1912951" y="4330907"/>
+            <a:ext cx="177127" cy="1"/>
+          </a:xfrm>
+          <a:prstGeom prst="straightConnector1">
+            <a:avLst/>
+          </a:prstGeom>
+          <a:ln w="12700">
+            <a:solidFill>
+              <a:schemeClr val="accent6"/>
+            </a:solidFill>
+            <a:prstDash val="solid"/>
+            <a:headEnd type="none" w="med" len="med"/>
+            <a:tailEnd type="triangle" w="med" len="med"/>
+          </a:ln>
+        </p:spPr>
+        <p:style>
+          <a:lnRef idx="1">
+            <a:schemeClr val="accent1"/>
+          </a:lnRef>
+          <a:fillRef idx="0">
+            <a:schemeClr val="accent1"/>
+          </a:fillRef>
+          <a:effectRef idx="0">
+            <a:schemeClr val="accent1"/>
+          </a:effectRef>
+          <a:fontRef idx="minor">
+            <a:schemeClr val="tx1"/>
+          </a:fontRef>
+        </p:style>
+      </p:cxnSp>
+      <p:sp>
+        <p:nvSpPr>
+          <p:cNvPr id="86" name="사각형: 둥근 모서리 12">
+            <a:extLst>
+              <a:ext uri="{FF2B5EF4-FFF2-40B4-BE49-F238E27FC236}">
+                <a16:creationId xmlns:a16="http://schemas.microsoft.com/office/drawing/2014/main" id="{457AB5F2-3F4B-9C44-2710-F31F4C1E26A9}"/>
+              </a:ext>
+            </a:extLst>
+          </p:cNvPr>
+          <p:cNvSpPr/>
+          <p:nvPr/>
+        </p:nvSpPr>
+        <p:spPr>
+          <a:xfrm>
+            <a:off x="773513" y="3392006"/>
+            <a:ext cx="1139438" cy="451511"/>
+          </a:xfrm>
+          <a:prstGeom prst="roundRect">
+            <a:avLst>
+              <a:gd name="adj" fmla="val 14105"/>
+            </a:avLst>
+          </a:prstGeom>
+          <a:noFill/>
+          <a:ln w="12700">
+            <a:headEnd type="none" w="med" len="med"/>
+            <a:tailEnd type="triangle" w="med" len="med"/>
+          </a:ln>
+        </p:spPr>
+        <p:style>
+          <a:lnRef idx="2">
+            <a:schemeClr val="dk1"/>
+          </a:lnRef>
+          <a:fillRef idx="1">
+            <a:schemeClr val="lt1"/>
+          </a:fillRef>
+          <a:effectRef idx="0">
+            <a:schemeClr val="dk1"/>
+          </a:effectRef>
+          <a:fontRef idx="minor">
+            <a:schemeClr val="dk1"/>
+          </a:fontRef>
+        </p:style>
+        <p:txBody>
+          <a:bodyPr rtlCol="0" anchor="ctr"/>
+          <a:lstStyle/>
+          <a:p>
+            <a:pPr algn="ctr"/>
+            <a:r>
+              <a:rPr lang="en-US" altLang="ko-KR" sz="900"/>
+              <a:t>Model A EPP</a:t>
+            </a:r>
+          </a:p>
+          <a:p>
+            <a:pPr algn="ctr"/>
+            <a:r>
+              <a:rPr lang="en-US" altLang="ko-KR" sz="900" b="1" dirty="0"/>
+              <a:t>Service</a:t>
+            </a:r>
+            <a:endParaRPr lang="ko-KR" altLang="en-US" sz="900" b="1" dirty="0"/>
+          </a:p>
+        </p:txBody>
+      </p:sp>
+      <p:sp>
+        <p:nvSpPr>
+          <p:cNvPr id="91" name="사각형: 둥근 모서리 12">
+            <a:extLst>
+              <a:ext uri="{FF2B5EF4-FFF2-40B4-BE49-F238E27FC236}">
+                <a16:creationId xmlns:a16="http://schemas.microsoft.com/office/drawing/2014/main" id="{E912B0FA-F58A-4D77-ABD6-AFE834A31D4C}"/>
+              </a:ext>
+            </a:extLst>
+          </p:cNvPr>
+          <p:cNvSpPr/>
+          <p:nvPr/>
+        </p:nvSpPr>
+        <p:spPr>
+          <a:xfrm>
+            <a:off x="3406643" y="4105151"/>
+            <a:ext cx="1139438" cy="451511"/>
+          </a:xfrm>
+          <a:prstGeom prst="roundRect">
+            <a:avLst>
+              <a:gd name="adj" fmla="val 14105"/>
+            </a:avLst>
+          </a:prstGeom>
+          <a:solidFill>
+            <a:schemeClr val="bg1">
+              <a:lumMod val="95000"/>
+            </a:schemeClr>
+          </a:solidFill>
+          <a:ln w="12700">
+            <a:headEnd type="none" w="med" len="med"/>
+            <a:tailEnd type="triangle" w="med" len="med"/>
+          </a:ln>
+        </p:spPr>
+        <p:style>
+          <a:lnRef idx="2">
+            <a:schemeClr val="dk1"/>
+          </a:lnRef>
+          <a:fillRef idx="1">
+            <a:schemeClr val="lt1"/>
+          </a:fillRef>
+          <a:effectRef idx="0">
+            <a:schemeClr val="dk1"/>
+          </a:effectRef>
+          <a:fontRef idx="minor">
+            <a:schemeClr val="dk1"/>
+          </a:fontRef>
+        </p:style>
+        <p:txBody>
+          <a:bodyPr rtlCol="0" anchor="ctr"/>
+          <a:lstStyle/>
+          <a:p>
+            <a:pPr algn="ctr"/>
+            <a:r>
+              <a:rPr lang="en-US" altLang="ko-KR" sz="900"/>
+              <a:t>Model A</a:t>
+            </a:r>
+          </a:p>
+          <a:p>
+            <a:pPr algn="ctr"/>
+            <a:r>
+              <a:rPr lang="en-US" altLang="ko-KR" sz="900" b="1"/>
+              <a:t>InferencePool</a:t>
+            </a:r>
+            <a:endParaRPr lang="ko-KR" altLang="en-US" sz="900" b="1" dirty="0"/>
+          </a:p>
+        </p:txBody>
+      </p:sp>
+      <p:cxnSp>
+        <p:nvCxnSpPr>
+          <p:cNvPr id="101" name="직선 화살표 연결선 100">
+            <a:extLst>
+              <a:ext uri="{FF2B5EF4-FFF2-40B4-BE49-F238E27FC236}">
+                <a16:creationId xmlns:a16="http://schemas.microsoft.com/office/drawing/2014/main" id="{87DB9170-53EA-BD4B-3D27-74B8CCEBCF05}"/>
+              </a:ext>
+            </a:extLst>
+          </p:cNvPr>
+          <p:cNvCxnSpPr>
+            <a:cxnSpLocks/>
+            <a:stCxn id="86" idx="2"/>
+            <a:endCxn id="79" idx="0"/>
+          </p:cNvCxnSpPr>
+          <p:nvPr/>
+        </p:nvCxnSpPr>
+        <p:spPr>
+          <a:xfrm>
+            <a:off x="1343232" y="3843517"/>
+            <a:ext cx="0" cy="261634"/>
+          </a:xfrm>
+          <a:prstGeom prst="straightConnector1">
+            <a:avLst/>
+          </a:prstGeom>
+          <a:ln w="12700">
+            <a:solidFill>
+              <a:schemeClr val="accent1"/>
+            </a:solidFill>
+            <a:prstDash val="solid"/>
+            <a:headEnd type="none" w="med" len="med"/>
+            <a:tailEnd type="triangle" w="med" len="med"/>
+          </a:ln>
+        </p:spPr>
+        <p:style>
+          <a:lnRef idx="1">
+            <a:schemeClr val="accent1"/>
+          </a:lnRef>
+          <a:fillRef idx="0">
+            <a:schemeClr val="accent1"/>
+          </a:fillRef>
+          <a:effectRef idx="0">
+            <a:schemeClr val="accent1"/>
+          </a:effectRef>
+          <a:fontRef idx="minor">
+            <a:schemeClr val="tx1"/>
+          </a:fontRef>
+        </p:style>
+      </p:cxnSp>
+      <p:cxnSp>
+        <p:nvCxnSpPr>
+          <p:cNvPr id="105" name="직선 화살표 연결선 104">
+            <a:extLst>
+              <a:ext uri="{FF2B5EF4-FFF2-40B4-BE49-F238E27FC236}">
+                <a16:creationId xmlns:a16="http://schemas.microsoft.com/office/drawing/2014/main" id="{C4199FF3-A9A1-451C-56C6-172C5E8719CC}"/>
+              </a:ext>
+            </a:extLst>
+          </p:cNvPr>
+          <p:cNvCxnSpPr>
+            <a:cxnSpLocks/>
+            <a:stCxn id="14" idx="1"/>
+            <a:endCxn id="86" idx="0"/>
+          </p:cNvCxnSpPr>
+          <p:nvPr/>
+        </p:nvCxnSpPr>
+        <p:spPr>
+          <a:xfrm flipH="1">
+            <a:off x="1343232" y="2573773"/>
+            <a:ext cx="746846" cy="818233"/>
+          </a:xfrm>
+          <a:prstGeom prst="straightConnector1">
+            <a:avLst/>
+          </a:prstGeom>
+          <a:ln w="12700">
+            <a:solidFill>
+              <a:schemeClr val="accent1"/>
+            </a:solidFill>
+            <a:prstDash val="solid"/>
+            <a:headEnd type="none" w="med" len="med"/>
+            <a:tailEnd type="triangle" w="med" len="med"/>
+          </a:ln>
+        </p:spPr>
+        <p:style>
+          <a:lnRef idx="1">
+            <a:schemeClr val="accent1"/>
+          </a:lnRef>
+          <a:fillRef idx="0">
+            <a:schemeClr val="accent1"/>
+          </a:fillRef>
+          <a:effectRef idx="0">
+            <a:schemeClr val="accent1"/>
+          </a:effectRef>
+          <a:fontRef idx="minor">
+            <a:schemeClr val="tx1"/>
+          </a:fontRef>
+        </p:style>
+      </p:cxnSp>
+      <p:sp>
+        <p:nvSpPr>
+          <p:cNvPr id="113" name="사각형: 둥근 모서리 12">
+            <a:extLst>
+              <a:ext uri="{FF2B5EF4-FFF2-40B4-BE49-F238E27FC236}">
+                <a16:creationId xmlns:a16="http://schemas.microsoft.com/office/drawing/2014/main" id="{653C2D99-4253-5A4C-B4A8-C2FED4517BF2}"/>
+              </a:ext>
+            </a:extLst>
+          </p:cNvPr>
+          <p:cNvSpPr/>
+          <p:nvPr/>
+        </p:nvSpPr>
+        <p:spPr>
+          <a:xfrm>
+            <a:off x="4716619" y="3392006"/>
+            <a:ext cx="1139438" cy="451511"/>
+          </a:xfrm>
+          <a:prstGeom prst="roundRect">
+            <a:avLst>
+              <a:gd name="adj" fmla="val 14105"/>
+            </a:avLst>
+          </a:prstGeom>
+          <a:solidFill>
+            <a:schemeClr val="bg1">
+              <a:lumMod val="95000"/>
+            </a:schemeClr>
+          </a:solidFill>
+          <a:ln w="12700">
+            <a:headEnd type="none" w="med" len="med"/>
+            <a:tailEnd type="triangle" w="med" len="med"/>
+          </a:ln>
+        </p:spPr>
+        <p:style>
+          <a:lnRef idx="2">
+            <a:schemeClr val="dk1"/>
+          </a:lnRef>
+          <a:fillRef idx="1">
+            <a:schemeClr val="lt1"/>
+          </a:fillRef>
+          <a:effectRef idx="0">
+            <a:schemeClr val="dk1"/>
+          </a:effectRef>
+          <a:fontRef idx="minor">
+            <a:schemeClr val="dk1"/>
+          </a:fontRef>
+        </p:style>
+        <p:txBody>
+          <a:bodyPr rtlCol="0" anchor="ctr"/>
+          <a:lstStyle/>
+          <a:p>
+            <a:pPr algn="ctr"/>
+            <a:r>
+              <a:rPr lang="en-US" altLang="ko-KR" sz="900"/>
+              <a:t>Model B</a:t>
+            </a:r>
+          </a:p>
+          <a:p>
+            <a:pPr algn="ctr"/>
+            <a:r>
+              <a:rPr lang="en-US" altLang="ko-KR" sz="900" b="1"/>
+              <a:t>HTTPRoute</a:t>
+            </a:r>
+            <a:endParaRPr lang="ko-KR" altLang="en-US" sz="900" b="1" dirty="0"/>
+          </a:p>
+        </p:txBody>
+      </p:sp>
+      <p:cxnSp>
+        <p:nvCxnSpPr>
+          <p:cNvPr id="114" name="직선 화살표 연결선 96">
+            <a:extLst>
+              <a:ext uri="{FF2B5EF4-FFF2-40B4-BE49-F238E27FC236}">
+                <a16:creationId xmlns:a16="http://schemas.microsoft.com/office/drawing/2014/main" id="{66156729-35F5-E913-5640-195344086CB6}"/>
+              </a:ext>
+            </a:extLst>
+          </p:cNvPr>
+          <p:cNvCxnSpPr>
+            <a:cxnSpLocks/>
+            <a:stCxn id="113" idx="2"/>
+            <a:endCxn id="115" idx="0"/>
+          </p:cNvCxnSpPr>
+          <p:nvPr/>
+        </p:nvCxnSpPr>
+        <p:spPr>
+          <a:xfrm>
+            <a:off x="5286338" y="3843517"/>
+            <a:ext cx="1287" cy="261633"/>
+          </a:xfrm>
+          <a:prstGeom prst="straightConnector1">
+            <a:avLst/>
+          </a:prstGeom>
+          <a:ln w="12700">
+            <a:solidFill>
+              <a:schemeClr val="tx1"/>
+            </a:solidFill>
+            <a:prstDash val="solid"/>
+            <a:headEnd type="none" w="med" len="med"/>
+            <a:tailEnd type="triangle" w="med" len="med"/>
+          </a:ln>
+        </p:spPr>
+        <p:style>
+          <a:lnRef idx="1">
+            <a:schemeClr val="accent1"/>
+          </a:lnRef>
+          <a:fillRef idx="0">
+            <a:schemeClr val="accent1"/>
+          </a:fillRef>
+          <a:effectRef idx="0">
+            <a:schemeClr val="accent1"/>
+          </a:effectRef>
+          <a:fontRef idx="minor">
+            <a:schemeClr val="tx1"/>
+          </a:fontRef>
+        </p:style>
+      </p:cxnSp>
+      <p:sp>
+        <p:nvSpPr>
+          <p:cNvPr id="115" name="사각형: 둥근 모서리 12">
+            <a:extLst>
+              <a:ext uri="{FF2B5EF4-FFF2-40B4-BE49-F238E27FC236}">
+                <a16:creationId xmlns:a16="http://schemas.microsoft.com/office/drawing/2014/main" id="{226B9A10-0947-08DE-2335-0E0A7EF9EFA6}"/>
+              </a:ext>
+            </a:extLst>
+          </p:cNvPr>
+          <p:cNvSpPr/>
+          <p:nvPr/>
+        </p:nvSpPr>
+        <p:spPr>
+          <a:xfrm>
+            <a:off x="4717906" y="4105150"/>
+            <a:ext cx="1139438" cy="451511"/>
+          </a:xfrm>
+          <a:prstGeom prst="roundRect">
+            <a:avLst>
+              <a:gd name="adj" fmla="val 14105"/>
+            </a:avLst>
+          </a:prstGeom>
+          <a:solidFill>
+            <a:schemeClr val="bg1">
+              <a:lumMod val="95000"/>
+            </a:schemeClr>
+          </a:solidFill>
+          <a:ln w="12700">
+            <a:headEnd type="none" w="med" len="med"/>
+            <a:tailEnd type="triangle" w="med" len="med"/>
+          </a:ln>
+        </p:spPr>
+        <p:style>
+          <a:lnRef idx="2">
+            <a:schemeClr val="dk1"/>
+          </a:lnRef>
+          <a:fillRef idx="1">
+            <a:schemeClr val="lt1"/>
+          </a:fillRef>
+          <a:effectRef idx="0">
+            <a:schemeClr val="dk1"/>
+          </a:effectRef>
+          <a:fontRef idx="minor">
+            <a:schemeClr val="dk1"/>
+          </a:fontRef>
+        </p:style>
+        <p:txBody>
+          <a:bodyPr rtlCol="0" anchor="ctr"/>
+          <a:lstStyle/>
+          <a:p>
+            <a:pPr algn="ctr"/>
+            <a:r>
+              <a:rPr lang="en-US" altLang="ko-KR" sz="900"/>
+              <a:t>Model B</a:t>
+            </a:r>
+          </a:p>
+          <a:p>
+            <a:pPr algn="ctr"/>
+            <a:r>
+              <a:rPr lang="en-US" altLang="ko-KR" sz="900" b="1"/>
+              <a:t>InferencePool</a:t>
+            </a:r>
+            <a:endParaRPr lang="ko-KR" altLang="en-US" sz="900" b="1" dirty="0"/>
+          </a:p>
+        </p:txBody>
+      </p:sp>
+      <p:sp>
+        <p:nvSpPr>
+          <p:cNvPr id="129" name="사각형: 둥근 모서리 12">
+            <a:extLst>
+              <a:ext uri="{FF2B5EF4-FFF2-40B4-BE49-F238E27FC236}">
+                <a16:creationId xmlns:a16="http://schemas.microsoft.com/office/drawing/2014/main" id="{A2EBA9B2-AA01-F2E4-6999-775DC361BF8E}"/>
+              </a:ext>
+            </a:extLst>
+          </p:cNvPr>
+          <p:cNvSpPr/>
+          <p:nvPr/>
+        </p:nvSpPr>
+        <p:spPr>
+          <a:xfrm>
+            <a:off x="6034548" y="4105151"/>
+            <a:ext cx="1139438" cy="451511"/>
+          </a:xfrm>
+          <a:prstGeom prst="roundRect">
+            <a:avLst>
+              <a:gd name="adj" fmla="val 14105"/>
+            </a:avLst>
+          </a:prstGeom>
+          <a:noFill/>
+          <a:ln w="12700">
+            <a:headEnd type="none" w="med" len="med"/>
+            <a:tailEnd type="triangle" w="med" len="med"/>
+          </a:ln>
+        </p:spPr>
+        <p:style>
+          <a:lnRef idx="2">
+            <a:schemeClr val="dk1"/>
+          </a:lnRef>
+          <a:fillRef idx="1">
+            <a:schemeClr val="lt1"/>
+          </a:fillRef>
+          <a:effectRef idx="0">
+            <a:schemeClr val="dk1"/>
+          </a:effectRef>
+          <a:fontRef idx="minor">
+            <a:schemeClr val="dk1"/>
+          </a:fontRef>
+        </p:style>
+        <p:txBody>
+          <a:bodyPr rtlCol="0" anchor="ctr"/>
+          <a:lstStyle/>
+          <a:p>
+            <a:pPr algn="ctr"/>
+            <a:r>
+              <a:rPr lang="en-US" altLang="ko-KR" sz="900"/>
+              <a:t>Model B</a:t>
+            </a:r>
+          </a:p>
+          <a:p>
+            <a:pPr algn="ctr"/>
+            <a:r>
+              <a:rPr lang="en-US" altLang="ko-KR" sz="900" b="1" dirty="0"/>
+              <a:t>Deployment</a:t>
+            </a:r>
+            <a:endParaRPr lang="ko-KR" altLang="en-US" sz="900" b="1" dirty="0"/>
+          </a:p>
+        </p:txBody>
+      </p:sp>
+      <p:cxnSp>
+        <p:nvCxnSpPr>
+          <p:cNvPr id="135" name="직선 화살표 연결선 96">
+            <a:extLst>
+              <a:ext uri="{FF2B5EF4-FFF2-40B4-BE49-F238E27FC236}">
+                <a16:creationId xmlns:a16="http://schemas.microsoft.com/office/drawing/2014/main" id="{4D588B21-249F-8BE8-3089-9B158B756BFB}"/>
+              </a:ext>
+            </a:extLst>
+          </p:cNvPr>
+          <p:cNvCxnSpPr>
+            <a:cxnSpLocks/>
+            <a:stCxn id="14" idx="2"/>
+            <a:endCxn id="129" idx="0"/>
+          </p:cNvCxnSpPr>
+          <p:nvPr/>
+        </p:nvCxnSpPr>
+        <p:spPr>
+          <a:xfrm>
+            <a:off x="2659797" y="2799528"/>
+            <a:ext cx="3944470" cy="1305623"/>
+          </a:xfrm>
+          <a:prstGeom prst="straightConnector1">
+            <a:avLst/>
+          </a:prstGeom>
+          <a:ln w="12700">
+            <a:solidFill>
+              <a:srgbClr val="C00000"/>
+            </a:solidFill>
+            <a:prstDash val="solid"/>
+            <a:headEnd type="none" w="med" len="med"/>
+            <a:tailEnd type="triangle" w="med" len="med"/>
+          </a:ln>
+        </p:spPr>
+        <p:style>
+          <a:lnRef idx="1">
+            <a:schemeClr val="accent1"/>
+          </a:lnRef>
+          <a:fillRef idx="0">
+            <a:schemeClr val="accent1"/>
+          </a:fillRef>
+          <a:effectRef idx="0">
+            <a:schemeClr val="accent1"/>
+          </a:effectRef>
+          <a:fontRef idx="minor">
+            <a:schemeClr val="tx1"/>
+          </a:fontRef>
+        </p:style>
+      </p:cxnSp>
+      <p:cxnSp>
+        <p:nvCxnSpPr>
+          <p:cNvPr id="143" name="직선 화살표 연결선 96">
+            <a:extLst>
+              <a:ext uri="{FF2B5EF4-FFF2-40B4-BE49-F238E27FC236}">
+                <a16:creationId xmlns:a16="http://schemas.microsoft.com/office/drawing/2014/main" id="{3BA6341D-8C4D-1AA1-BDC4-FA8748CE2BF5}"/>
+              </a:ext>
+            </a:extLst>
+          </p:cNvPr>
+          <p:cNvCxnSpPr>
+            <a:cxnSpLocks/>
+            <a:stCxn id="113" idx="0"/>
+            <a:endCxn id="7" idx="2"/>
+          </p:cNvCxnSpPr>
+          <p:nvPr/>
+        </p:nvCxnSpPr>
+        <p:spPr>
+          <a:xfrm flipV="1">
+            <a:off x="5286338" y="2098909"/>
+            <a:ext cx="0" cy="1293097"/>
+          </a:xfrm>
+          <a:prstGeom prst="straightConnector1">
+            <a:avLst/>
+          </a:prstGeom>
+          <a:ln w="12700">
+            <a:solidFill>
+              <a:schemeClr val="tx1"/>
+            </a:solidFill>
+            <a:prstDash val="solid"/>
+            <a:headEnd type="none" w="med" len="med"/>
+            <a:tailEnd type="triangle" w="med" len="med"/>
+          </a:ln>
+        </p:spPr>
+        <p:style>
+          <a:lnRef idx="1">
+            <a:schemeClr val="accent1"/>
+          </a:lnRef>
+          <a:fillRef idx="0">
+            <a:schemeClr val="accent1"/>
+          </a:fillRef>
+          <a:effectRef idx="0">
+            <a:schemeClr val="accent1"/>
+          </a:effectRef>
+          <a:fontRef idx="minor">
+            <a:schemeClr val="tx1"/>
+          </a:fontRef>
+        </p:style>
+      </p:cxnSp>
+      <p:cxnSp>
+        <p:nvCxnSpPr>
+          <p:cNvPr id="148" name="직선 화살표 연결선 96">
+            <a:extLst>
+              <a:ext uri="{FF2B5EF4-FFF2-40B4-BE49-F238E27FC236}">
+                <a16:creationId xmlns:a16="http://schemas.microsoft.com/office/drawing/2014/main" id="{C638ADAA-AAFB-E4FA-3543-5EF3B29BEE38}"/>
+              </a:ext>
+            </a:extLst>
+          </p:cNvPr>
+          <p:cNvCxnSpPr>
+            <a:cxnSpLocks/>
+            <a:stCxn id="91" idx="1"/>
+            <a:endCxn id="21" idx="3"/>
+          </p:cNvCxnSpPr>
+          <p:nvPr/>
+        </p:nvCxnSpPr>
+        <p:spPr>
+          <a:xfrm flipH="1">
+            <a:off x="3229516" y="4330907"/>
+            <a:ext cx="177127" cy="1"/>
+          </a:xfrm>
+          <a:prstGeom prst="straightConnector1">
+            <a:avLst/>
+          </a:prstGeom>
+          <a:ln w="12700">
+            <a:solidFill>
+              <a:schemeClr val="tx1"/>
+            </a:solidFill>
+            <a:prstDash val="solid"/>
+            <a:headEnd type="none" w="med" len="med"/>
+            <a:tailEnd type="triangle" w="med" len="med"/>
+          </a:ln>
+        </p:spPr>
+        <p:style>
+          <a:lnRef idx="1">
+            <a:schemeClr val="accent1"/>
+          </a:lnRef>
+          <a:fillRef idx="0">
+            <a:schemeClr val="accent1"/>
+          </a:fillRef>
+          <a:effectRef idx="0">
+            <a:schemeClr val="accent1"/>
+          </a:effectRef>
+          <a:fontRef idx="minor">
+            <a:schemeClr val="tx1"/>
+          </a:fontRef>
+        </p:style>
+      </p:cxnSp>
+      <p:cxnSp>
+        <p:nvCxnSpPr>
+          <p:cNvPr id="153" name="직선 화살표 연결선 96">
+            <a:extLst>
+              <a:ext uri="{FF2B5EF4-FFF2-40B4-BE49-F238E27FC236}">
+                <a16:creationId xmlns:a16="http://schemas.microsoft.com/office/drawing/2014/main" id="{DA7B4DB8-D3A3-4DC7-3F40-3959853FE6E8}"/>
+              </a:ext>
+            </a:extLst>
+          </p:cNvPr>
+          <p:cNvCxnSpPr>
+            <a:cxnSpLocks/>
+            <a:stCxn id="115" idx="3"/>
+            <a:endCxn id="129" idx="1"/>
+          </p:cNvCxnSpPr>
+          <p:nvPr/>
+        </p:nvCxnSpPr>
+        <p:spPr>
+          <a:xfrm>
+            <a:off x="5857344" y="4330906"/>
+            <a:ext cx="177204" cy="1"/>
+          </a:xfrm>
+          <a:prstGeom prst="straightConnector1">
+            <a:avLst/>
+          </a:prstGeom>
+          <a:ln w="12700">
+            <a:solidFill>
+              <a:schemeClr val="tx1"/>
+            </a:solidFill>
+            <a:prstDash val="solid"/>
+            <a:headEnd type="none" w="med" len="med"/>
+            <a:tailEnd type="triangle" w="med" len="med"/>
+          </a:ln>
+        </p:spPr>
+        <p:style>
+          <a:lnRef idx="1">
+            <a:schemeClr val="accent1"/>
+          </a:lnRef>
+          <a:fillRef idx="0">
+            <a:schemeClr val="accent1"/>
+          </a:fillRef>
+          <a:effectRef idx="0">
+            <a:schemeClr val="accent1"/>
+          </a:effectRef>
+          <a:fontRef idx="minor">
+            <a:schemeClr val="tx1"/>
+          </a:fontRef>
+        </p:style>
+      </p:cxnSp>
+      <p:sp>
+        <p:nvSpPr>
+          <p:cNvPr id="179" name="사각형: 둥근 모서리 12">
+            <a:extLst>
+              <a:ext uri="{FF2B5EF4-FFF2-40B4-BE49-F238E27FC236}">
+                <a16:creationId xmlns:a16="http://schemas.microsoft.com/office/drawing/2014/main" id="{5BD81799-DA4A-5D82-95B0-D74D85341E56}"/>
+              </a:ext>
+            </a:extLst>
+          </p:cNvPr>
+          <p:cNvSpPr/>
+          <p:nvPr/>
+        </p:nvSpPr>
+        <p:spPr>
+          <a:xfrm>
+            <a:off x="7351190" y="4105151"/>
+            <a:ext cx="1139438" cy="451511"/>
+          </a:xfrm>
+          <a:prstGeom prst="roundRect">
+            <a:avLst>
+              <a:gd name="adj" fmla="val 14105"/>
+            </a:avLst>
+          </a:prstGeom>
+          <a:noFill/>
+          <a:ln w="12700">
+            <a:headEnd type="none" w="med" len="med"/>
+            <a:tailEnd type="triangle" w="med" len="med"/>
+          </a:ln>
+        </p:spPr>
+        <p:style>
+          <a:lnRef idx="2">
+            <a:schemeClr val="dk1"/>
+          </a:lnRef>
+          <a:fillRef idx="1">
+            <a:schemeClr val="lt1"/>
+          </a:fillRef>
+          <a:effectRef idx="0">
+            <a:schemeClr val="dk1"/>
+          </a:effectRef>
+          <a:fontRef idx="minor">
+            <a:schemeClr val="dk1"/>
+          </a:fontRef>
+        </p:style>
+        <p:txBody>
+          <a:bodyPr rtlCol="0" anchor="ctr"/>
+          <a:lstStyle/>
+          <a:p>
+            <a:pPr algn="ctr"/>
+            <a:r>
+              <a:rPr lang="en-US" altLang="ko-KR" sz="900"/>
+              <a:t>Model B EPP</a:t>
+            </a:r>
+          </a:p>
+          <a:p>
+            <a:pPr algn="ctr"/>
+            <a:r>
+              <a:rPr lang="en-US" altLang="ko-KR" sz="900" b="1" dirty="0"/>
+              <a:t>Deployment</a:t>
+            </a:r>
+            <a:endParaRPr lang="ko-KR" altLang="en-US" sz="900" b="1" dirty="0"/>
+          </a:p>
+        </p:txBody>
+      </p:sp>
+      <p:sp>
+        <p:nvSpPr>
+          <p:cNvPr id="181" name="사각형: 둥근 모서리 12">
+            <a:extLst>
+              <a:ext uri="{FF2B5EF4-FFF2-40B4-BE49-F238E27FC236}">
+                <a16:creationId xmlns:a16="http://schemas.microsoft.com/office/drawing/2014/main" id="{03B65821-AE0F-9098-C0F3-2C94562F8CCC}"/>
+              </a:ext>
+            </a:extLst>
+          </p:cNvPr>
+          <p:cNvSpPr/>
+          <p:nvPr/>
+        </p:nvSpPr>
+        <p:spPr>
+          <a:xfrm>
+            <a:off x="7351190" y="3392006"/>
+            <a:ext cx="1139438" cy="451511"/>
+          </a:xfrm>
+          <a:prstGeom prst="roundRect">
+            <a:avLst>
+              <a:gd name="adj" fmla="val 14105"/>
+            </a:avLst>
+          </a:prstGeom>
+          <a:noFill/>
+          <a:ln w="12700">
+            <a:headEnd type="none" w="med" len="med"/>
+            <a:tailEnd type="triangle" w="med" len="med"/>
+          </a:ln>
+        </p:spPr>
+        <p:style>
+          <a:lnRef idx="2">
+            <a:schemeClr val="dk1"/>
+          </a:lnRef>
+          <a:fillRef idx="1">
+            <a:schemeClr val="lt1"/>
+          </a:fillRef>
+          <a:effectRef idx="0">
+            <a:schemeClr val="dk1"/>
+          </a:effectRef>
+          <a:fontRef idx="minor">
+            <a:schemeClr val="dk1"/>
+          </a:fontRef>
+        </p:style>
+        <p:txBody>
+          <a:bodyPr rtlCol="0" anchor="ctr"/>
+          <a:lstStyle/>
+          <a:p>
+            <a:pPr algn="ctr"/>
+            <a:r>
+              <a:rPr lang="en-US" altLang="ko-KR" sz="900"/>
+              <a:t>Model B EPP</a:t>
+            </a:r>
+          </a:p>
+          <a:p>
+            <a:pPr algn="ctr"/>
+            <a:r>
+              <a:rPr lang="en-US" altLang="ko-KR" sz="900" b="1" dirty="0"/>
+              <a:t>Service</a:t>
+            </a:r>
+            <a:endParaRPr lang="ko-KR" altLang="en-US" sz="900" b="1" dirty="0"/>
+          </a:p>
+        </p:txBody>
+      </p:sp>
+      <p:cxnSp>
+        <p:nvCxnSpPr>
+          <p:cNvPr id="183" name="직선 화살표 연결선 96">
+            <a:extLst>
+              <a:ext uri="{FF2B5EF4-FFF2-40B4-BE49-F238E27FC236}">
+                <a16:creationId xmlns:a16="http://schemas.microsoft.com/office/drawing/2014/main" id="{CDE2A276-6EF5-280D-A89B-4E4C84023377}"/>
+              </a:ext>
+            </a:extLst>
+          </p:cNvPr>
+          <p:cNvCxnSpPr>
+            <a:cxnSpLocks/>
+            <a:stCxn id="179" idx="1"/>
+            <a:endCxn id="129" idx="3"/>
+          </p:cNvCxnSpPr>
+          <p:nvPr/>
+        </p:nvCxnSpPr>
+        <p:spPr>
+          <a:xfrm flipH="1">
+            <a:off x="7173986" y="4330907"/>
+            <a:ext cx="177204" cy="0"/>
+          </a:xfrm>
+          <a:prstGeom prst="straightConnector1">
+            <a:avLst/>
+          </a:prstGeom>
+          <a:ln w="12700">
+            <a:solidFill>
+              <a:schemeClr val="accent6"/>
+            </a:solidFill>
+            <a:prstDash val="solid"/>
+            <a:headEnd type="none" w="med" len="med"/>
+            <a:tailEnd type="triangle" w="med" len="med"/>
+          </a:ln>
+        </p:spPr>
+        <p:style>
+          <a:lnRef idx="1">
+            <a:schemeClr val="accent1"/>
+          </a:lnRef>
+          <a:fillRef idx="0">
+            <a:schemeClr val="accent1"/>
+          </a:fillRef>
+          <a:effectRef idx="0">
+            <a:schemeClr val="accent1"/>
+          </a:effectRef>
+          <a:fontRef idx="minor">
+            <a:schemeClr val="tx1"/>
+          </a:fontRef>
+        </p:style>
+      </p:cxnSp>
+      <p:cxnSp>
+        <p:nvCxnSpPr>
+          <p:cNvPr id="189" name="직선 화살표 연결선 188">
+            <a:extLst>
+              <a:ext uri="{FF2B5EF4-FFF2-40B4-BE49-F238E27FC236}">
+                <a16:creationId xmlns:a16="http://schemas.microsoft.com/office/drawing/2014/main" id="{0FE760FE-75F9-E6E5-F540-F52AF6F0624F}"/>
+              </a:ext>
+            </a:extLst>
+          </p:cNvPr>
+          <p:cNvCxnSpPr>
+            <a:cxnSpLocks/>
+            <a:stCxn id="14" idx="3"/>
+            <a:endCxn id="181" idx="0"/>
+          </p:cNvCxnSpPr>
+          <p:nvPr/>
+        </p:nvCxnSpPr>
+        <p:spPr>
+          <a:xfrm>
+            <a:off x="3229516" y="2573773"/>
+            <a:ext cx="4691393" cy="818233"/>
+          </a:xfrm>
+          <a:prstGeom prst="straightConnector1">
+            <a:avLst/>
+          </a:prstGeom>
+          <a:ln w="12700">
+            <a:solidFill>
+              <a:schemeClr val="accent1"/>
+            </a:solidFill>
+            <a:prstDash val="solid"/>
+            <a:headEnd type="none" w="med" len="med"/>
+            <a:tailEnd type="triangle" w="med" len="med"/>
+          </a:ln>
+        </p:spPr>
+        <p:style>
+          <a:lnRef idx="1">
+            <a:schemeClr val="accent1"/>
+          </a:lnRef>
+          <a:fillRef idx="0">
+            <a:schemeClr val="accent1"/>
+          </a:fillRef>
+          <a:effectRef idx="0">
+            <a:schemeClr val="accent1"/>
+          </a:effectRef>
+          <a:fontRef idx="minor">
+            <a:schemeClr val="tx1"/>
+          </a:fontRef>
+        </p:style>
+      </p:cxnSp>
+      <p:cxnSp>
+        <p:nvCxnSpPr>
+          <p:cNvPr id="193" name="직선 화살표 연결선 192">
+            <a:extLst>
+              <a:ext uri="{FF2B5EF4-FFF2-40B4-BE49-F238E27FC236}">
+                <a16:creationId xmlns:a16="http://schemas.microsoft.com/office/drawing/2014/main" id="{8B2E9EFB-0811-9B7D-D648-F9A153297749}"/>
+              </a:ext>
+            </a:extLst>
+          </p:cNvPr>
+          <p:cNvCxnSpPr>
+            <a:cxnSpLocks/>
+            <a:stCxn id="181" idx="2"/>
+            <a:endCxn id="179" idx="0"/>
+          </p:cNvCxnSpPr>
+          <p:nvPr/>
+        </p:nvCxnSpPr>
+        <p:spPr>
+          <a:xfrm>
+            <a:off x="7920909" y="3843517"/>
+            <a:ext cx="0" cy="261634"/>
+          </a:xfrm>
+          <a:prstGeom prst="straightConnector1">
+            <a:avLst/>
+          </a:prstGeom>
+          <a:ln w="12700">
+            <a:solidFill>
+              <a:schemeClr val="accent1"/>
+            </a:solidFill>
+            <a:prstDash val="solid"/>
+            <a:headEnd type="none" w="med" len="med"/>
+            <a:tailEnd type="triangle" w="med" len="med"/>
+          </a:ln>
+        </p:spPr>
+        <p:style>
+          <a:lnRef idx="1">
+            <a:schemeClr val="accent1"/>
+          </a:lnRef>
+          <a:fillRef idx="0">
+            <a:schemeClr val="accent1"/>
+          </a:fillRef>
+          <a:effectRef idx="0">
+            <a:schemeClr val="accent1"/>
+          </a:effectRef>
+          <a:fontRef idx="minor">
+            <a:schemeClr val="tx1"/>
+          </a:fontRef>
+        </p:style>
+      </p:cxnSp>
+      <p:cxnSp>
+        <p:nvCxnSpPr>
+          <p:cNvPr id="202" name="직선 화살표 연결선 96">
+            <a:extLst>
+              <a:ext uri="{FF2B5EF4-FFF2-40B4-BE49-F238E27FC236}">
+                <a16:creationId xmlns:a16="http://schemas.microsoft.com/office/drawing/2014/main" id="{DEC1E2ED-F0C7-7C19-5D6A-AC0FD46DF283}"/>
+              </a:ext>
+            </a:extLst>
+          </p:cNvPr>
+          <p:cNvCxnSpPr>
+            <a:cxnSpLocks/>
+          </p:cNvCxnSpPr>
+          <p:nvPr/>
+        </p:nvCxnSpPr>
+        <p:spPr>
+          <a:xfrm>
+            <a:off x="7392531" y="344943"/>
+            <a:ext cx="323569" cy="0"/>
+          </a:xfrm>
+          <a:prstGeom prst="straightConnector1">
+            <a:avLst/>
+          </a:prstGeom>
+          <a:ln w="12700">
+            <a:solidFill>
+              <a:schemeClr val="tx1"/>
+            </a:solidFill>
+            <a:prstDash val="solid"/>
+            <a:headEnd type="none" w="med" len="med"/>
+            <a:tailEnd type="triangle" w="med" len="med"/>
+          </a:ln>
+        </p:spPr>
+        <p:style>
+          <a:lnRef idx="1">
+            <a:schemeClr val="accent1"/>
+          </a:lnRef>
+          <a:fillRef idx="0">
+            <a:schemeClr val="accent1"/>
+          </a:fillRef>
+          <a:effectRef idx="0">
+            <a:schemeClr val="accent1"/>
+          </a:effectRef>
+          <a:fontRef idx="minor">
+            <a:schemeClr val="tx1"/>
+          </a:fontRef>
+        </p:style>
+      </p:cxnSp>
+      <p:sp>
+        <p:nvSpPr>
+          <p:cNvPr id="203" name="TextBox 202">
+            <a:extLst>
+              <a:ext uri="{FF2B5EF4-FFF2-40B4-BE49-F238E27FC236}">
+                <a16:creationId xmlns:a16="http://schemas.microsoft.com/office/drawing/2014/main" id="{132EA128-F18A-CCE9-538A-9C2D8F4CB162}"/>
+              </a:ext>
+            </a:extLst>
+          </p:cNvPr>
+          <p:cNvSpPr txBox="1"/>
+          <p:nvPr/>
+        </p:nvSpPr>
+        <p:spPr>
+          <a:xfrm>
+            <a:off x="7688274" y="235173"/>
+            <a:ext cx="702455" cy="230832"/>
+          </a:xfrm>
+          <a:prstGeom prst="rect">
+            <a:avLst/>
+          </a:prstGeom>
+          <a:noFill/>
+        </p:spPr>
+        <p:txBody>
+          <a:bodyPr wrap="square" rtlCol="0">
+            <a:spAutoFit/>
+          </a:bodyPr>
+          <a:lstStyle/>
+          <a:p>
+            <a:r>
+              <a:rPr lang="en-US" sz="900"/>
+              <a:t>Reference</a:t>
+            </a:r>
+            <a:endParaRPr lang="en-KR" sz="900"/>
+          </a:p>
+        </p:txBody>
+      </p:sp>
+      <p:cxnSp>
+        <p:nvCxnSpPr>
+          <p:cNvPr id="204" name="직선 화살표 연결선 96">
+            <a:extLst>
+              <a:ext uri="{FF2B5EF4-FFF2-40B4-BE49-F238E27FC236}">
+                <a16:creationId xmlns:a16="http://schemas.microsoft.com/office/drawing/2014/main" id="{E11BE529-362C-C324-2170-56E8D9781E54}"/>
+              </a:ext>
+            </a:extLst>
+          </p:cNvPr>
+          <p:cNvCxnSpPr>
+            <a:cxnSpLocks/>
+          </p:cNvCxnSpPr>
+          <p:nvPr/>
+        </p:nvCxnSpPr>
+        <p:spPr>
+          <a:xfrm>
+            <a:off x="7392531" y="581192"/>
+            <a:ext cx="323569" cy="0"/>
+          </a:xfrm>
+          <a:prstGeom prst="straightConnector1">
+            <a:avLst/>
+          </a:prstGeom>
+          <a:ln w="12700">
+            <a:solidFill>
+              <a:srgbClr val="C00000"/>
+            </a:solidFill>
+            <a:prstDash val="solid"/>
+            <a:headEnd type="none" w="med" len="med"/>
+            <a:tailEnd type="triangle" w="med" len="med"/>
+          </a:ln>
+        </p:spPr>
+        <p:style>
+          <a:lnRef idx="1">
+            <a:schemeClr val="accent1"/>
+          </a:lnRef>
+          <a:fillRef idx="0">
+            <a:schemeClr val="accent1"/>
+          </a:fillRef>
+          <a:effectRef idx="0">
+            <a:schemeClr val="accent1"/>
+          </a:effectRef>
+          <a:fontRef idx="minor">
+            <a:schemeClr val="tx1"/>
+          </a:fontRef>
+        </p:style>
+      </p:cxnSp>
+      <p:sp>
+        <p:nvSpPr>
+          <p:cNvPr id="205" name="TextBox 204">
+            <a:extLst>
+              <a:ext uri="{FF2B5EF4-FFF2-40B4-BE49-F238E27FC236}">
+                <a16:creationId xmlns:a16="http://schemas.microsoft.com/office/drawing/2014/main" id="{E8073E05-84E5-2A3E-83D8-3350E2D08F94}"/>
+              </a:ext>
+            </a:extLst>
+          </p:cNvPr>
+          <p:cNvSpPr txBox="1"/>
+          <p:nvPr/>
+        </p:nvSpPr>
+        <p:spPr>
+          <a:xfrm>
+            <a:off x="7688274" y="471422"/>
+            <a:ext cx="581551" cy="230832"/>
+          </a:xfrm>
+          <a:prstGeom prst="rect">
+            <a:avLst/>
+          </a:prstGeom>
+          <a:noFill/>
+        </p:spPr>
+        <p:txBody>
+          <a:bodyPr wrap="square" rtlCol="0">
+            <a:spAutoFit/>
+          </a:bodyPr>
+          <a:lstStyle/>
+          <a:p>
+            <a:r>
+              <a:rPr lang="en-US" sz="900"/>
+              <a:t>Traffic</a:t>
+            </a:r>
+            <a:endParaRPr lang="en-KR" sz="900"/>
+          </a:p>
+        </p:txBody>
+      </p:sp>
+      <p:cxnSp>
+        <p:nvCxnSpPr>
+          <p:cNvPr id="206" name="직선 화살표 연결선 96">
+            <a:extLst>
+              <a:ext uri="{FF2B5EF4-FFF2-40B4-BE49-F238E27FC236}">
+                <a16:creationId xmlns:a16="http://schemas.microsoft.com/office/drawing/2014/main" id="{133FEAF6-6A36-6873-E337-E73841C69A49}"/>
+              </a:ext>
+            </a:extLst>
+          </p:cNvPr>
+          <p:cNvCxnSpPr>
+            <a:cxnSpLocks/>
+          </p:cNvCxnSpPr>
+          <p:nvPr/>
+        </p:nvCxnSpPr>
+        <p:spPr>
+          <a:xfrm>
+            <a:off x="7392531" y="815249"/>
+            <a:ext cx="323569" cy="0"/>
+          </a:xfrm>
+          <a:prstGeom prst="straightConnector1">
+            <a:avLst/>
+          </a:prstGeom>
+          <a:ln w="12700">
+            <a:solidFill>
+              <a:schemeClr val="accent3"/>
+            </a:solidFill>
+            <a:prstDash val="solid"/>
+            <a:headEnd type="none" w="med" len="med"/>
+            <a:tailEnd type="triangle" w="med" len="med"/>
+          </a:ln>
+        </p:spPr>
+        <p:style>
+          <a:lnRef idx="1">
+            <a:schemeClr val="accent1"/>
+          </a:lnRef>
+          <a:fillRef idx="0">
+            <a:schemeClr val="accent1"/>
+          </a:fillRef>
+          <a:effectRef idx="0">
+            <a:schemeClr val="accent1"/>
+          </a:effectRef>
+          <a:fontRef idx="minor">
+            <a:schemeClr val="tx1"/>
+          </a:fontRef>
+        </p:style>
+      </p:cxnSp>
+      <p:sp>
+        <p:nvSpPr>
+          <p:cNvPr id="207" name="TextBox 206">
+            <a:extLst>
+              <a:ext uri="{FF2B5EF4-FFF2-40B4-BE49-F238E27FC236}">
+                <a16:creationId xmlns:a16="http://schemas.microsoft.com/office/drawing/2014/main" id="{19B83B14-16E4-C88B-691A-15CD3EC9DCC5}"/>
+              </a:ext>
+            </a:extLst>
+          </p:cNvPr>
+          <p:cNvSpPr txBox="1"/>
+          <p:nvPr/>
+        </p:nvSpPr>
+        <p:spPr>
+          <a:xfrm>
+            <a:off x="7688274" y="705479"/>
+            <a:ext cx="581551" cy="230832"/>
+          </a:xfrm>
+          <a:prstGeom prst="rect">
+            <a:avLst/>
+          </a:prstGeom>
+          <a:noFill/>
+        </p:spPr>
+        <p:txBody>
+          <a:bodyPr wrap="square" rtlCol="0">
+            <a:spAutoFit/>
+          </a:bodyPr>
+          <a:lstStyle/>
+          <a:p>
+            <a:r>
+              <a:rPr lang="en-US" sz="900"/>
+              <a:t>Create</a:t>
+            </a:r>
+            <a:endParaRPr lang="en-KR" sz="900"/>
+          </a:p>
+        </p:txBody>
+      </p:sp>
+      <p:cxnSp>
+        <p:nvCxnSpPr>
+          <p:cNvPr id="209" name="직선 화살표 연결선 96">
+            <a:extLst>
+              <a:ext uri="{FF2B5EF4-FFF2-40B4-BE49-F238E27FC236}">
+                <a16:creationId xmlns:a16="http://schemas.microsoft.com/office/drawing/2014/main" id="{1A28CDDD-4DD8-3157-6236-BAF17DEF8B15}"/>
+              </a:ext>
+            </a:extLst>
+          </p:cNvPr>
+          <p:cNvCxnSpPr>
+            <a:cxnSpLocks/>
+          </p:cNvCxnSpPr>
+          <p:nvPr/>
+        </p:nvCxnSpPr>
+        <p:spPr>
+          <a:xfrm>
+            <a:off x="7392531" y="1049305"/>
+            <a:ext cx="323569" cy="0"/>
+          </a:xfrm>
+          <a:prstGeom prst="straightConnector1">
+            <a:avLst/>
+          </a:prstGeom>
+          <a:ln w="12700">
+            <a:solidFill>
+              <a:schemeClr val="accent1"/>
+            </a:solidFill>
+            <a:prstDash val="solid"/>
+            <a:headEnd type="none" w="med" len="med"/>
+            <a:tailEnd type="triangle" w="med" len="med"/>
+          </a:ln>
+        </p:spPr>
+        <p:style>
+          <a:lnRef idx="1">
+            <a:schemeClr val="accent1"/>
+          </a:lnRef>
+          <a:fillRef idx="0">
+            <a:schemeClr val="accent1"/>
+          </a:fillRef>
+          <a:effectRef idx="0">
+            <a:schemeClr val="accent1"/>
+          </a:effectRef>
+          <a:fontRef idx="minor">
+            <a:schemeClr val="tx1"/>
+          </a:fontRef>
+        </p:style>
+      </p:cxnSp>
+      <p:sp>
+        <p:nvSpPr>
+          <p:cNvPr id="210" name="TextBox 209">
+            <a:extLst>
+              <a:ext uri="{FF2B5EF4-FFF2-40B4-BE49-F238E27FC236}">
+                <a16:creationId xmlns:a16="http://schemas.microsoft.com/office/drawing/2014/main" id="{D7444550-0DC4-FDD6-FD76-DBE8FCD15464}"/>
+              </a:ext>
+            </a:extLst>
+          </p:cNvPr>
+          <p:cNvSpPr txBox="1"/>
+          <p:nvPr/>
+        </p:nvSpPr>
+        <p:spPr>
+          <a:xfrm>
+            <a:off x="7688274" y="939535"/>
+            <a:ext cx="1030964" cy="230832"/>
+          </a:xfrm>
+          <a:prstGeom prst="rect">
+            <a:avLst/>
+          </a:prstGeom>
+          <a:noFill/>
+        </p:spPr>
+        <p:txBody>
+          <a:bodyPr wrap="square" rtlCol="0">
+            <a:spAutoFit/>
+          </a:bodyPr>
+          <a:lstStyle/>
+          <a:p>
+            <a:r>
+              <a:rPr lang="en-US" sz="900"/>
+              <a:t>Select Endpoint</a:t>
+            </a:r>
+            <a:endParaRPr lang="en-KR" sz="900"/>
+          </a:p>
+        </p:txBody>
+      </p:sp>
+      <p:cxnSp>
+        <p:nvCxnSpPr>
+          <p:cNvPr id="211" name="직선 화살표 연결선 96">
+            <a:extLst>
+              <a:ext uri="{FF2B5EF4-FFF2-40B4-BE49-F238E27FC236}">
+                <a16:creationId xmlns:a16="http://schemas.microsoft.com/office/drawing/2014/main" id="{B54CEA2E-DA2C-5D0A-45DF-8F0B8E677460}"/>
+              </a:ext>
+            </a:extLst>
+          </p:cNvPr>
+          <p:cNvCxnSpPr>
+            <a:cxnSpLocks/>
+          </p:cNvCxnSpPr>
+          <p:nvPr/>
+        </p:nvCxnSpPr>
+        <p:spPr>
+          <a:xfrm>
+            <a:off x="7392531" y="1289382"/>
+            <a:ext cx="323569" cy="0"/>
+          </a:xfrm>
+          <a:prstGeom prst="straightConnector1">
+            <a:avLst/>
+          </a:prstGeom>
+          <a:ln w="12700">
+            <a:solidFill>
+              <a:schemeClr val="accent6"/>
+            </a:solidFill>
+            <a:prstDash val="solid"/>
+            <a:headEnd type="none" w="med" len="med"/>
+            <a:tailEnd type="triangle" w="med" len="med"/>
+          </a:ln>
+        </p:spPr>
+        <p:style>
+          <a:lnRef idx="1">
+            <a:schemeClr val="accent1"/>
+          </a:lnRef>
+          <a:fillRef idx="0">
+            <a:schemeClr val="accent1"/>
+          </a:fillRef>
+          <a:effectRef idx="0">
+            <a:schemeClr val="accent1"/>
+          </a:effectRef>
+          <a:fontRef idx="minor">
+            <a:schemeClr val="tx1"/>
+          </a:fontRef>
+        </p:style>
+      </p:cxnSp>
+      <p:sp>
+        <p:nvSpPr>
+          <p:cNvPr id="213" name="TextBox 212">
+            <a:extLst>
+              <a:ext uri="{FF2B5EF4-FFF2-40B4-BE49-F238E27FC236}">
+                <a16:creationId xmlns:a16="http://schemas.microsoft.com/office/drawing/2014/main" id="{D4836501-A37F-ECF8-398F-78BFA28F90CD}"/>
+              </a:ext>
+            </a:extLst>
+          </p:cNvPr>
+          <p:cNvSpPr txBox="1"/>
+          <p:nvPr/>
+        </p:nvSpPr>
+        <p:spPr>
+          <a:xfrm>
+            <a:off x="7688274" y="1179612"/>
+            <a:ext cx="1030964" cy="230832"/>
+          </a:xfrm>
+          <a:prstGeom prst="rect">
+            <a:avLst/>
+          </a:prstGeom>
+          <a:noFill/>
+        </p:spPr>
+        <p:txBody>
+          <a:bodyPr wrap="square" rtlCol="0">
+            <a:spAutoFit/>
+          </a:bodyPr>
+          <a:lstStyle/>
+          <a:p>
+            <a:r>
+              <a:rPr lang="en-US" sz="900"/>
+              <a:t>Get Metrics</a:t>
+            </a:r>
+            <a:endParaRPr lang="en-KR" sz="900"/>
+          </a:p>
+        </p:txBody>
+      </p:sp>
+      <p:cxnSp>
+        <p:nvCxnSpPr>
+          <p:cNvPr id="6" name="직선 화살표 연결선 96">
+            <a:extLst>
+              <a:ext uri="{FF2B5EF4-FFF2-40B4-BE49-F238E27FC236}">
+                <a16:creationId xmlns:a16="http://schemas.microsoft.com/office/drawing/2014/main" id="{AB576C8F-825E-B100-26B7-8DBDBB5E9065}"/>
+              </a:ext>
+            </a:extLst>
+          </p:cNvPr>
+          <p:cNvCxnSpPr>
+            <a:cxnSpLocks/>
+            <a:stCxn id="91" idx="1"/>
+            <a:endCxn id="86" idx="3"/>
+          </p:cNvCxnSpPr>
+          <p:nvPr/>
+        </p:nvCxnSpPr>
+        <p:spPr>
+          <a:xfrm flipH="1" flipV="1">
+            <a:off x="1912951" y="3617762"/>
+            <a:ext cx="1493692" cy="713145"/>
+          </a:xfrm>
+          <a:prstGeom prst="straightConnector1">
+            <a:avLst/>
+          </a:prstGeom>
+          <a:ln w="12700">
+            <a:solidFill>
+              <a:schemeClr val="tx1"/>
+            </a:solidFill>
+            <a:prstDash val="solid"/>
+            <a:headEnd type="none" w="med" len="med"/>
+            <a:tailEnd type="triangle" w="med" len="med"/>
+          </a:ln>
+        </p:spPr>
+        <p:style>
+          <a:lnRef idx="1">
+            <a:schemeClr val="accent1"/>
+          </a:lnRef>
+          <a:fillRef idx="0">
+            <a:schemeClr val="accent1"/>
+          </a:fillRef>
+          <a:effectRef idx="0">
+            <a:schemeClr val="accent1"/>
+          </a:effectRef>
+          <a:fontRef idx="minor">
+            <a:schemeClr val="tx1"/>
+          </a:fontRef>
+        </p:style>
+      </p:cxnSp>
+      <p:cxnSp>
+        <p:nvCxnSpPr>
+          <p:cNvPr id="13" name="직선 화살표 연결선 96">
+            <a:extLst>
+              <a:ext uri="{FF2B5EF4-FFF2-40B4-BE49-F238E27FC236}">
+                <a16:creationId xmlns:a16="http://schemas.microsoft.com/office/drawing/2014/main" id="{6F7C0FB5-3001-88F7-A8B5-7F0DDD7EFB34}"/>
+              </a:ext>
+            </a:extLst>
+          </p:cNvPr>
+          <p:cNvCxnSpPr>
+            <a:cxnSpLocks/>
+            <a:stCxn id="115" idx="3"/>
+            <a:endCxn id="181" idx="1"/>
+          </p:cNvCxnSpPr>
+          <p:nvPr/>
+        </p:nvCxnSpPr>
+        <p:spPr>
+          <a:xfrm flipV="1">
+            <a:off x="5857344" y="3617762"/>
+            <a:ext cx="1493846" cy="713144"/>
+          </a:xfrm>
+          <a:prstGeom prst="straightConnector1">
+            <a:avLst/>
+          </a:prstGeom>
+          <a:ln w="12700">
+            <a:solidFill>
+              <a:schemeClr val="tx1"/>
+            </a:solidFill>
+            <a:prstDash val="solid"/>
+            <a:headEnd type="none" w="med" len="med"/>
+            <a:tailEnd type="triangle" w="med" len="med"/>
+          </a:ln>
+        </p:spPr>
+        <p:style>
+          <a:lnRef idx="1">
+            <a:schemeClr val="accent1"/>
+          </a:lnRef>
+          <a:fillRef idx="0">
+            <a:schemeClr val="accent1"/>
+          </a:fillRef>
+          <a:effectRef idx="0">
+            <a:schemeClr val="accent1"/>
+          </a:effectRef>
+          <a:fontRef idx="minor">
+            <a:schemeClr val="tx1"/>
+          </a:fontRef>
+        </p:style>
+      </p:cxnSp>
+      <p:sp>
+        <p:nvSpPr>
+          <p:cNvPr id="4" name="사각형: 둥근 모서리 12">
+            <a:extLst>
+              <a:ext uri="{FF2B5EF4-FFF2-40B4-BE49-F238E27FC236}">
+                <a16:creationId xmlns:a16="http://schemas.microsoft.com/office/drawing/2014/main" id="{DDC6116D-F7BF-B3E8-5EE7-2A2FD1C6A0F0}"/>
+              </a:ext>
+            </a:extLst>
+          </p:cNvPr>
+          <p:cNvSpPr/>
+          <p:nvPr/>
+        </p:nvSpPr>
+        <p:spPr>
+          <a:xfrm>
+            <a:off x="6030533" y="629972"/>
+            <a:ext cx="1139438" cy="451511"/>
+          </a:xfrm>
+          <a:prstGeom prst="roundRect">
+            <a:avLst>
+              <a:gd name="adj" fmla="val 14105"/>
+            </a:avLst>
+          </a:prstGeom>
+          <a:solidFill>
+            <a:schemeClr val="bg2">
+              <a:lumMod val="90000"/>
+            </a:schemeClr>
+          </a:solidFill>
+          <a:ln w="12700">
+            <a:headEnd type="none" w="med" len="med"/>
+            <a:tailEnd type="triangle" w="med" len="med"/>
+          </a:ln>
+        </p:spPr>
+        <p:style>
+          <a:lnRef idx="2">
+            <a:schemeClr val="dk1"/>
+          </a:lnRef>
+          <a:fillRef idx="1">
+            <a:schemeClr val="lt1"/>
+          </a:fillRef>
+          <a:effectRef idx="0">
+            <a:schemeClr val="dk1"/>
+          </a:effectRef>
+          <a:fontRef idx="minor">
+            <a:schemeClr val="dk1"/>
+          </a:fontRef>
+        </p:style>
+        <p:txBody>
+          <a:bodyPr rtlCol="0" anchor="ctr"/>
+          <a:lstStyle/>
+          <a:p>
+            <a:pPr algn="ctr"/>
+            <a:r>
+              <a:rPr lang="en-US" altLang="ko-KR" sz="900"/>
+              <a:t>Gateway Controller</a:t>
+            </a:r>
+            <a:r>
+              <a:rPr lang="en-US" altLang="ko-KR" sz="900" b="1"/>
+              <a:t> </a:t>
+            </a:r>
+            <a:br>
+              <a:rPr lang="en-US" altLang="ko-KR" sz="900" b="1"/>
+            </a:br>
+            <a:r>
+              <a:rPr lang="en-US" altLang="ko-KR" sz="900" b="1"/>
+              <a:t>Deployment</a:t>
+            </a:r>
+            <a:endParaRPr lang="ko-KR" altLang="en-US" sz="900" b="1" dirty="0"/>
+          </a:p>
+        </p:txBody>
+      </p:sp>
+      <p:sp>
+        <p:nvSpPr>
+          <p:cNvPr id="5" name="사각형: 둥근 모서리 70">
+            <a:extLst>
+              <a:ext uri="{FF2B5EF4-FFF2-40B4-BE49-F238E27FC236}">
+                <a16:creationId xmlns:a16="http://schemas.microsoft.com/office/drawing/2014/main" id="{D39FDFB6-3C19-609C-526B-8413D23FF83A}"/>
+              </a:ext>
+            </a:extLst>
+          </p:cNvPr>
+          <p:cNvSpPr/>
+          <p:nvPr/>
+        </p:nvSpPr>
+        <p:spPr>
+          <a:xfrm>
+            <a:off x="5933695" y="227291"/>
+            <a:ext cx="1337932" cy="951484"/>
+          </a:xfrm>
+          <a:prstGeom prst="roundRect">
+            <a:avLst>
+              <a:gd name="adj" fmla="val 7127"/>
+            </a:avLst>
+          </a:prstGeom>
+          <a:noFill/>
+          <a:ln w="12700">
+            <a:prstDash val="solid"/>
+            <a:headEnd type="none" w="med" len="med"/>
+            <a:tailEnd type="triangle" w="med" len="med"/>
+          </a:ln>
+        </p:spPr>
+        <p:style>
+          <a:lnRef idx="2">
+            <a:schemeClr val="dk1"/>
+          </a:lnRef>
+          <a:fillRef idx="1">
+            <a:schemeClr val="lt1"/>
+          </a:fillRef>
+          <a:effectRef idx="0">
+            <a:schemeClr val="dk1"/>
+          </a:effectRef>
+          <a:fontRef idx="minor">
+            <a:schemeClr val="dk1"/>
+          </a:fontRef>
+        </p:style>
+        <p:txBody>
+          <a:bodyPr rtlCol="0" anchor="t"/>
+          <a:lstStyle/>
+          <a:p>
+            <a:r>
+              <a:rPr lang="en-US" altLang="ko-KR" sz="1000" dirty="0"/>
+              <a:t>Controller </a:t>
+            </a:r>
+            <a:r>
+              <a:rPr lang="en-US" altLang="ko-KR" sz="1000" b="1" dirty="0"/>
+              <a:t>Namespace</a:t>
+            </a:r>
+            <a:endParaRPr lang="ko-KR" altLang="en-US" sz="1000" b="1" dirty="0"/>
+          </a:p>
+        </p:txBody>
+      </p:sp>
+    </p:spTree>
+    <p:extLst>
+      <p:ext uri="{BB962C8B-B14F-4D97-AF65-F5344CB8AC3E}">
+        <p14:creationId xmlns:p14="http://schemas.microsoft.com/office/powerpoint/2010/main" val="1809012553"/>
+      </p:ext>
+    </p:extLst>
+  </p:cSld>
+  <p:clrMapOvr>
+    <a:masterClrMapping/>
+  </p:clrMapOvr>
+</p:sld>
+</file>
+
+<file path=ppt/slides/slide2.xml><?xml version="1.0" encoding="utf-8"?>
+<p:sld xmlns:a="http://schemas.openxmlformats.org/drawingml/2006/main" xmlns:r="http://schemas.openxmlformats.org/officeDocument/2006/relationships" xmlns:p="http://schemas.openxmlformats.org/presentationml/2006/main">
+  <p:cSld>
+    <p:spTree>
+      <p:nvGrpSpPr>
+        <p:cNvPr id="1" name="">
+          <a:extLst>
+            <a:ext uri="{FF2B5EF4-FFF2-40B4-BE49-F238E27FC236}">
               <a16:creationId xmlns:a16="http://schemas.microsoft.com/office/drawing/2014/main" id="{CB748935-DA93-1F89-C2C8-9496EA63EAFD}"/>
             </a:ext>
           </a:extLst>
@@ -6513,7 +9316,7 @@
 </p:sld>
 </file>
 
-<file path=ppt/slides/slide2.xml><?xml version="1.0" encoding="utf-8"?>
+<file path=ppt/slides/slide3.xml><?xml version="1.0" encoding="utf-8"?>
 <p:sld xmlns:a="http://schemas.openxmlformats.org/drawingml/2006/main" xmlns:r="http://schemas.openxmlformats.org/officeDocument/2006/relationships" xmlns:p="http://schemas.openxmlformats.org/presentationml/2006/main">
   <p:cSld>
     <p:spTree>
@@ -6549,7 +9352,7 @@
 </p:sld>
 </file>
 
-<file path=ppt/slides/slide3.xml><?xml version="1.0" encoding="utf-8"?>
+<file path=ppt/slides/slide4.xml><?xml version="1.0" encoding="utf-8"?>
 <p:sld xmlns:a="http://schemas.openxmlformats.org/drawingml/2006/main" xmlns:r="http://schemas.openxmlformats.org/officeDocument/2006/relationships" xmlns:p="http://schemas.openxmlformats.org/presentationml/2006/main">
   <p:cSld>
     <p:spTree>
@@ -9728,7 +12531,7 @@
 </p:sld>
 </file>
 
-<file path=ppt/slides/slide4.xml><?xml version="1.0" encoding="utf-8"?>
+<file path=ppt/slides/slide5.xml><?xml version="1.0" encoding="utf-8"?>
 <p:sld xmlns:a="http://schemas.openxmlformats.org/drawingml/2006/main" xmlns:r="http://schemas.openxmlformats.org/officeDocument/2006/relationships" xmlns:p="http://schemas.openxmlformats.org/presentationml/2006/main">
   <p:cSld>
     <p:spTree>
@@ -12907,7 +15710,7 @@
 </p:sld>
 </file>
 
-<file path=ppt/slides/slide5.xml><?xml version="1.0" encoding="utf-8"?>
+<file path=ppt/slides/slide6.xml><?xml version="1.0" encoding="utf-8"?>
 <p:sld xmlns:a="http://schemas.openxmlformats.org/drawingml/2006/main" xmlns:r="http://schemas.openxmlformats.org/officeDocument/2006/relationships" xmlns:p="http://schemas.openxmlformats.org/presentationml/2006/main">
   <p:cSld>
     <p:spTree>
@@ -15996,7 +18799,7 @@
 </p:sld>
 </file>
 
-<file path=ppt/slides/slide6.xml><?xml version="1.0" encoding="utf-8"?>
+<file path=ppt/slides/slide7.xml><?xml version="1.0" encoding="utf-8"?>
 <p:sld xmlns:a="http://schemas.openxmlformats.org/drawingml/2006/main" xmlns:r="http://schemas.openxmlformats.org/officeDocument/2006/relationships" xmlns:p="http://schemas.openxmlformats.org/presentationml/2006/main">
   <p:cSld>
     <p:spTree>
@@ -19265,7 +22068,7 @@
 </p:sld>
 </file>
 
-<file path=ppt/slides/slide7.xml><?xml version="1.0" encoding="utf-8"?>
+<file path=ppt/slides/slide8.xml><?xml version="1.0" encoding="utf-8"?>
 <p:sld xmlns:a="http://schemas.openxmlformats.org/drawingml/2006/main" xmlns:r="http://schemas.openxmlformats.org/officeDocument/2006/relationships" xmlns:p="http://schemas.openxmlformats.org/presentationml/2006/main">
   <p:cSld>
     <p:spTree>
